--- a/template/buidlguidl-devcon8.pptx
+++ b/template/buidlguidl-devcon8.pptx
@@ -154,7 +154,7 @@
         </p:nvSpPr>
         <p:spPr>
           <a:xfrm>
-            <a:off x="762000" y="1371600"/>
+            <a:off x="762000" y="1270000"/>
             <a:ext cx="6350000" cy="298450"/>
           </a:xfrm>
           <a:prstGeom prst="rect">
@@ -393,7 +393,7 @@
         </p:nvSpPr>
         <p:spPr>
           <a:xfrm>
-            <a:off x="762000" y="1371600"/>
+            <a:off x="762000" y="1270000"/>
             <a:ext cx="6350000" cy="298450"/>
           </a:xfrm>
           <a:prstGeom prst="rect">
@@ -682,7 +682,7 @@
         </p:nvSpPr>
         <p:spPr>
           <a:xfrm>
-            <a:off x="762000" y="1371600"/>
+            <a:off x="762000" y="1270000"/>
             <a:ext cx="6350000" cy="298450"/>
           </a:xfrm>
           <a:prstGeom prst="rect">

--- a/template/buidlguidl-devcon8.pptx
+++ b/template/buidlguidl-devcon8.pptx
@@ -225,13 +225,13 @@
                 <a:spcPts val="0"/>
               </a:spcBef>
               <a:buNone/>
-              <a:defRPr sz="4800" b="0">
+              <a:defRPr sz="4800" b="1">
                 <a:solidFill>
                   <a:srgbClr val="182232"/>
                 </a:solidFill>
-                <a:latin typeface="PP Neue Machina Inktrap Smbold"/>
-                <a:ea typeface="PP Neue Machina Inktrap Smbold"/>
-                <a:cs typeface="PP Neue Machina Inktrap Smbold"/>
+                <a:latin typeface="Space Grotesk"/>
+                <a:ea typeface="Space Grotesk"/>
+                <a:cs typeface="Space Grotesk"/>
               </a:defRPr>
             </a:lvl1pPr>
           </a:lstStyle>
@@ -464,13 +464,13 @@
                 <a:spcPts val="0"/>
               </a:spcBef>
               <a:buNone/>
-              <a:defRPr sz="4800" b="0">
+              <a:defRPr sz="4800" b="1">
                 <a:solidFill>
                   <a:srgbClr val="182232"/>
                 </a:solidFill>
-                <a:latin typeface="PP Neue Machina Inktrap Smbold"/>
-                <a:ea typeface="PP Neue Machina Inktrap Smbold"/>
-                <a:cs typeface="PP Neue Machina Inktrap Smbold"/>
+                <a:latin typeface="Space Grotesk"/>
+                <a:ea typeface="Space Grotesk"/>
+                <a:cs typeface="Space Grotesk"/>
               </a:defRPr>
             </a:lvl1pPr>
           </a:lstStyle>
@@ -753,13 +753,13 @@
                 <a:spcPts val="0"/>
               </a:spcBef>
               <a:buNone/>
-              <a:defRPr sz="4800" b="0">
+              <a:defRPr sz="4800" b="1">
                 <a:solidFill>
                   <a:srgbClr val="182232"/>
                 </a:solidFill>
-                <a:latin typeface="PP Neue Machina Inktrap Smbold"/>
-                <a:ea typeface="PP Neue Machina Inktrap Smbold"/>
-                <a:cs typeface="PP Neue Machina Inktrap Smbold"/>
+                <a:latin typeface="Space Grotesk"/>
+                <a:ea typeface="Space Grotesk"/>
+                <a:cs typeface="Space Grotesk"/>
               </a:defRPr>
             </a:lvl1pPr>
           </a:lstStyle>
@@ -945,13 +945,13 @@
                 <a:spcPts val="0"/>
               </a:spcBef>
               <a:buNone/>
-              <a:defRPr sz="6000" b="0">
+              <a:defRPr sz="6000" b="1">
                 <a:solidFill>
                   <a:srgbClr val="182232"/>
                 </a:solidFill>
-                <a:latin typeface="PP Neue Machina Inktrap Smbold"/>
-                <a:ea typeface="PP Neue Machina Inktrap Smbold"/>
-                <a:cs typeface="PP Neue Machina Inktrap Smbold"/>
+                <a:latin typeface="Space Grotesk"/>
+                <a:ea typeface="Space Grotesk"/>
+                <a:cs typeface="Space Grotesk"/>
               </a:defRPr>
             </a:lvl1pPr>
           </a:lstStyle>
@@ -1087,13 +1087,13 @@
                 <a:spcPts val="0"/>
               </a:spcBef>
               <a:buNone/>
-              <a:defRPr sz="4000" b="0">
+              <a:defRPr sz="4000" b="1">
                 <a:solidFill>
                   <a:srgbClr val="182232"/>
                 </a:solidFill>
-                <a:latin typeface="PP Neue Machina Inktrap Smbold"/>
-                <a:ea typeface="PP Neue Machina Inktrap Smbold"/>
-                <a:cs typeface="PP Neue Machina Inktrap Smbold"/>
+                <a:latin typeface="Space Grotesk"/>
+                <a:ea typeface="Space Grotesk"/>
+                <a:cs typeface="Space Grotesk"/>
               </a:defRPr>
             </a:lvl1pPr>
           </a:lstStyle>
@@ -1234,13 +1234,13 @@
                 <a:spcPts val="0"/>
               </a:spcBef>
               <a:buNone/>
-              <a:defRPr sz="4000" b="0">
+              <a:defRPr sz="4000" b="1">
                 <a:solidFill>
                   <a:srgbClr val="182232"/>
                 </a:solidFill>
-                <a:latin typeface="PP Neue Machina Inktrap Smbold"/>
-                <a:ea typeface="PP Neue Machina Inktrap Smbold"/>
-                <a:cs typeface="PP Neue Machina Inktrap Smbold"/>
+                <a:latin typeface="Space Grotesk"/>
+                <a:ea typeface="Space Grotesk"/>
+                <a:cs typeface="Space Grotesk"/>
               </a:defRPr>
             </a:lvl1pPr>
           </a:lstStyle>
@@ -1375,13 +1375,13 @@
                 <a:spcPts val="0"/>
               </a:spcBef>
               <a:buNone/>
-              <a:defRPr sz="4000" b="0">
+              <a:defRPr sz="4000" b="1">
                 <a:solidFill>
                   <a:srgbClr val="182232"/>
                 </a:solidFill>
-                <a:latin typeface="PP Neue Machina Inktrap Smbold"/>
-                <a:ea typeface="PP Neue Machina Inktrap Smbold"/>
-                <a:cs typeface="PP Neue Machina Inktrap Smbold"/>
+                <a:latin typeface="Space Grotesk"/>
+                <a:ea typeface="Space Grotesk"/>
+                <a:cs typeface="Space Grotesk"/>
               </a:defRPr>
             </a:lvl1pPr>
           </a:lstStyle>
@@ -2132,13 +2132,13 @@
                 <a:spcPts val="0"/>
               </a:spcBef>
               <a:buNone/>
-              <a:defRPr sz="6000" b="0">
+              <a:defRPr sz="6000" b="1">
                 <a:solidFill>
                   <a:srgbClr val="182232"/>
                 </a:solidFill>
-                <a:latin typeface="PP Neue Machina Inktrap Smbold"/>
-                <a:ea typeface="PP Neue Machina Inktrap Smbold"/>
-                <a:cs typeface="PP Neue Machina Inktrap Smbold"/>
+                <a:latin typeface="Space Grotesk"/>
+                <a:ea typeface="Space Grotesk"/>
+                <a:cs typeface="Space Grotesk"/>
               </a:defRPr>
             </a:lvl1pPr>
           </a:lstStyle>
@@ -2224,13 +2224,13 @@
                 <a:spcPts val="0"/>
               </a:spcBef>
               <a:buNone/>
-              <a:defRPr sz="4000" b="0">
+              <a:defRPr sz="4000" b="1">
                 <a:solidFill>
                   <a:srgbClr val="FFFCFC"/>
                 </a:solidFill>
-                <a:latin typeface="PP Neue Machina Inktrap Smbold"/>
-                <a:ea typeface="PP Neue Machina Inktrap Smbold"/>
-                <a:cs typeface="PP Neue Machina Inktrap Smbold"/>
+                <a:latin typeface="Space Grotesk"/>
+                <a:ea typeface="Space Grotesk"/>
+                <a:cs typeface="Space Grotesk"/>
               </a:defRPr>
             </a:lvl1pPr>
           </a:lstStyle>
@@ -2416,13 +2416,13 @@
                 <a:spcPts val="0"/>
               </a:spcBef>
               <a:buNone/>
-              <a:defRPr sz="4000" b="0">
+              <a:defRPr sz="4000" b="1">
                 <a:solidFill>
                   <a:srgbClr val="182232"/>
                 </a:solidFill>
-                <a:latin typeface="PP Neue Machina Inktrap Smbold"/>
-                <a:ea typeface="PP Neue Machina Inktrap Smbold"/>
-                <a:cs typeface="PP Neue Machina Inktrap Smbold"/>
+                <a:latin typeface="Space Grotesk"/>
+                <a:ea typeface="Space Grotesk"/>
+                <a:cs typeface="Space Grotesk"/>
               </a:defRPr>
             </a:lvl1pPr>
           </a:lstStyle>
@@ -2635,13 +2635,13 @@
                 <a:spcPts val="0"/>
               </a:spcBef>
               <a:buNone/>
-              <a:defRPr sz="4000" b="0">
+              <a:defRPr sz="4000" b="1">
                 <a:solidFill>
                   <a:srgbClr val="182232"/>
                 </a:solidFill>
-                <a:latin typeface="PP Neue Machina Inktrap Smbold"/>
-                <a:ea typeface="PP Neue Machina Inktrap Smbold"/>
-                <a:cs typeface="PP Neue Machina Inktrap Smbold"/>
+                <a:latin typeface="Space Grotesk"/>
+                <a:ea typeface="Space Grotesk"/>
+                <a:cs typeface="Space Grotesk"/>
               </a:defRPr>
             </a:lvl1pPr>
           </a:lstStyle>
@@ -3507,12 +3507,12 @@
         </p:nvSpPr>
         <p:spPr>
           <a:xfrm>
-            <a:off x="3117850" y="2724150"/>
-            <a:ext cx="4806950" cy="768350"/>
+            <a:off x="2990850" y="2603500"/>
+            <a:ext cx="4254500" cy="996950"/>
           </a:xfrm>
           <a:prstGeom prst="roundRect">
             <a:avLst>
-              <a:gd name="adj" fmla="val 14049"/>
+              <a:gd name="adj" fmla="val 10828"/>
             </a:avLst>
           </a:prstGeom>
           <a:solidFill>
@@ -4682,7 +4682,7 @@
     </a:clrScheme>
     <a:fontScheme name="Office">
       <a:majorFont>
-        <a:latin typeface="PP Neue Machina Inktrap Smbold"/>
+        <a:latin typeface="Space Grotesk"/>
         <a:ea typeface=""/>
         <a:cs typeface=""/>
         <a:font script="Jpan" typeface="ＭＳ Ｐゴシック"/>

--- a/template/buidlguidl-devcon8.pptx
+++ b/template/buidlguidl-devcon8.pptx
@@ -225,13 +225,13 @@
                 <a:spcPts val="0"/>
               </a:spcBef>
               <a:buNone/>
-              <a:defRPr sz="4800" b="1">
+              <a:defRPr sz="4800" b="0">
                 <a:solidFill>
                   <a:srgbClr val="182232"/>
                 </a:solidFill>
-                <a:latin typeface="Space Grotesk"/>
-                <a:ea typeface="Space Grotesk"/>
-                <a:cs typeface="Space Grotesk"/>
+                <a:latin typeface="PP Neue Machina Inktrap Smbold"/>
+                <a:ea typeface="PP Neue Machina Inktrap Smbold"/>
+                <a:cs typeface="PP Neue Machina Inktrap Smbold"/>
               </a:defRPr>
             </a:lvl1pPr>
           </a:lstStyle>
@@ -464,13 +464,13 @@
                 <a:spcPts val="0"/>
               </a:spcBef>
               <a:buNone/>
-              <a:defRPr sz="4800" b="1">
+              <a:defRPr sz="4800" b="0">
                 <a:solidFill>
                   <a:srgbClr val="182232"/>
                 </a:solidFill>
-                <a:latin typeface="Space Grotesk"/>
-                <a:ea typeface="Space Grotesk"/>
-                <a:cs typeface="Space Grotesk"/>
+                <a:latin typeface="PP Neue Machina Inktrap Smbold"/>
+                <a:ea typeface="PP Neue Machina Inktrap Smbold"/>
+                <a:cs typeface="PP Neue Machina Inktrap Smbold"/>
               </a:defRPr>
             </a:lvl1pPr>
           </a:lstStyle>
@@ -753,13 +753,13 @@
                 <a:spcPts val="0"/>
               </a:spcBef>
               <a:buNone/>
-              <a:defRPr sz="4800" b="1">
+              <a:defRPr sz="4800" b="0">
                 <a:solidFill>
                   <a:srgbClr val="182232"/>
                 </a:solidFill>
-                <a:latin typeface="Space Grotesk"/>
-                <a:ea typeface="Space Grotesk"/>
-                <a:cs typeface="Space Grotesk"/>
+                <a:latin typeface="PP Neue Machina Inktrap Smbold"/>
+                <a:ea typeface="PP Neue Machina Inktrap Smbold"/>
+                <a:cs typeface="PP Neue Machina Inktrap Smbold"/>
               </a:defRPr>
             </a:lvl1pPr>
           </a:lstStyle>
@@ -945,13 +945,13 @@
                 <a:spcPts val="0"/>
               </a:spcBef>
               <a:buNone/>
-              <a:defRPr sz="6000" b="1">
+              <a:defRPr sz="6000" b="0">
                 <a:solidFill>
                   <a:srgbClr val="182232"/>
                 </a:solidFill>
-                <a:latin typeface="Space Grotesk"/>
-                <a:ea typeface="Space Grotesk"/>
-                <a:cs typeface="Space Grotesk"/>
+                <a:latin typeface="PP Neue Machina Inktrap Smbold"/>
+                <a:ea typeface="PP Neue Machina Inktrap Smbold"/>
+                <a:cs typeface="PP Neue Machina Inktrap Smbold"/>
               </a:defRPr>
             </a:lvl1pPr>
           </a:lstStyle>
@@ -1087,13 +1087,13 @@
                 <a:spcPts val="0"/>
               </a:spcBef>
               <a:buNone/>
-              <a:defRPr sz="4000" b="1">
+              <a:defRPr sz="4000" b="0">
                 <a:solidFill>
                   <a:srgbClr val="182232"/>
                 </a:solidFill>
-                <a:latin typeface="Space Grotesk"/>
-                <a:ea typeface="Space Grotesk"/>
-                <a:cs typeface="Space Grotesk"/>
+                <a:latin typeface="PP Neue Machina Inktrap Smbold"/>
+                <a:ea typeface="PP Neue Machina Inktrap Smbold"/>
+                <a:cs typeface="PP Neue Machina Inktrap Smbold"/>
               </a:defRPr>
             </a:lvl1pPr>
           </a:lstStyle>
@@ -1234,13 +1234,13 @@
                 <a:spcPts val="0"/>
               </a:spcBef>
               <a:buNone/>
-              <a:defRPr sz="4000" b="1">
+              <a:defRPr sz="4000" b="0">
                 <a:solidFill>
                   <a:srgbClr val="182232"/>
                 </a:solidFill>
-                <a:latin typeface="Space Grotesk"/>
-                <a:ea typeface="Space Grotesk"/>
-                <a:cs typeface="Space Grotesk"/>
+                <a:latin typeface="PP Neue Machina Inktrap Smbold"/>
+                <a:ea typeface="PP Neue Machina Inktrap Smbold"/>
+                <a:cs typeface="PP Neue Machina Inktrap Smbold"/>
               </a:defRPr>
             </a:lvl1pPr>
           </a:lstStyle>
@@ -1375,13 +1375,13 @@
                 <a:spcPts val="0"/>
               </a:spcBef>
               <a:buNone/>
-              <a:defRPr sz="4000" b="1">
+              <a:defRPr sz="4000" b="0">
                 <a:solidFill>
                   <a:srgbClr val="182232"/>
                 </a:solidFill>
-                <a:latin typeface="Space Grotesk"/>
-                <a:ea typeface="Space Grotesk"/>
-                <a:cs typeface="Space Grotesk"/>
+                <a:latin typeface="PP Neue Machina Inktrap Smbold"/>
+                <a:ea typeface="PP Neue Machina Inktrap Smbold"/>
+                <a:cs typeface="PP Neue Machina Inktrap Smbold"/>
               </a:defRPr>
             </a:lvl1pPr>
           </a:lstStyle>
@@ -2132,13 +2132,13 @@
                 <a:spcPts val="0"/>
               </a:spcBef>
               <a:buNone/>
-              <a:defRPr sz="6000" b="1">
+              <a:defRPr sz="6000" b="0">
                 <a:solidFill>
                   <a:srgbClr val="182232"/>
                 </a:solidFill>
-                <a:latin typeface="Space Grotesk"/>
-                <a:ea typeface="Space Grotesk"/>
-                <a:cs typeface="Space Grotesk"/>
+                <a:latin typeface="PP Neue Machina Inktrap Smbold"/>
+                <a:ea typeface="PP Neue Machina Inktrap Smbold"/>
+                <a:cs typeface="PP Neue Machina Inktrap Smbold"/>
               </a:defRPr>
             </a:lvl1pPr>
           </a:lstStyle>
@@ -2224,13 +2224,13 @@
                 <a:spcPts val="0"/>
               </a:spcBef>
               <a:buNone/>
-              <a:defRPr sz="4000" b="1">
+              <a:defRPr sz="4000" b="0">
                 <a:solidFill>
                   <a:srgbClr val="FFFCFC"/>
                 </a:solidFill>
-                <a:latin typeface="Space Grotesk"/>
-                <a:ea typeface="Space Grotesk"/>
-                <a:cs typeface="Space Grotesk"/>
+                <a:latin typeface="PP Neue Machina Inktrap Smbold"/>
+                <a:ea typeface="PP Neue Machina Inktrap Smbold"/>
+                <a:cs typeface="PP Neue Machina Inktrap Smbold"/>
               </a:defRPr>
             </a:lvl1pPr>
           </a:lstStyle>
@@ -2416,13 +2416,13 @@
                 <a:spcPts val="0"/>
               </a:spcBef>
               <a:buNone/>
-              <a:defRPr sz="4000" b="1">
+              <a:defRPr sz="4000" b="0">
                 <a:solidFill>
                   <a:srgbClr val="182232"/>
                 </a:solidFill>
-                <a:latin typeface="Space Grotesk"/>
-                <a:ea typeface="Space Grotesk"/>
-                <a:cs typeface="Space Grotesk"/>
+                <a:latin typeface="PP Neue Machina Inktrap Smbold"/>
+                <a:ea typeface="PP Neue Machina Inktrap Smbold"/>
+                <a:cs typeface="PP Neue Machina Inktrap Smbold"/>
               </a:defRPr>
             </a:lvl1pPr>
           </a:lstStyle>
@@ -2635,13 +2635,13 @@
                 <a:spcPts val="0"/>
               </a:spcBef>
               <a:buNone/>
-              <a:defRPr sz="4000" b="1">
+              <a:defRPr sz="4000" b="0">
                 <a:solidFill>
                   <a:srgbClr val="182232"/>
                 </a:solidFill>
-                <a:latin typeface="Space Grotesk"/>
-                <a:ea typeface="Space Grotesk"/>
-                <a:cs typeface="Space Grotesk"/>
+                <a:latin typeface="PP Neue Machina Inktrap Smbold"/>
+                <a:ea typeface="PP Neue Machina Inktrap Smbold"/>
+                <a:cs typeface="PP Neue Machina Inktrap Smbold"/>
               </a:defRPr>
             </a:lvl1pPr>
           </a:lstStyle>
@@ -3507,12 +3507,12 @@
         </p:nvSpPr>
         <p:spPr>
           <a:xfrm>
-            <a:off x="2990850" y="2603500"/>
-            <a:ext cx="4254500" cy="996950"/>
+            <a:off x="3117850" y="2724150"/>
+            <a:ext cx="4806950" cy="768350"/>
           </a:xfrm>
           <a:prstGeom prst="roundRect">
             <a:avLst>
-              <a:gd name="adj" fmla="val 10828"/>
+              <a:gd name="adj" fmla="val 14049"/>
             </a:avLst>
           </a:prstGeom>
           <a:solidFill>
@@ -4682,7 +4682,7 @@
     </a:clrScheme>
     <a:fontScheme name="Office">
       <a:majorFont>
-        <a:latin typeface="Space Grotesk"/>
+        <a:latin typeface="PP Neue Machina Inktrap Smbold"/>
         <a:ea typeface=""/>
         <a:cs typeface=""/>
         <a:font script="Jpan" typeface="ＭＳ Ｐゴシック"/>

--- a/template/buidlguidl-devcon8.pptx
+++ b/template/buidlguidl-devcon8.pptx
@@ -17,7 +17,7 @@
     <p:sldId id="265" r:id="rId16"/>
     <p:sldId id="266" r:id="rId17"/>
   </p:sldIdLst>
-  <p:sldSz cx="12192000" cy="6858000" type="screen4x3"/>
+  <p:sldSz cx="9144000" cy="5143500" type="screen4x3"/>
   <p:notesSz cx="6858000" cy="9144000"/>
   <p:defaultTextStyle>
     <a:defPPr>
@@ -154,8 +154,8 @@
         </p:nvSpPr>
         <p:spPr>
           <a:xfrm>
-            <a:off x="762000" y="1270000"/>
-            <a:ext cx="6350000" cy="298450"/>
+            <a:off x="571500" y="952500"/>
+            <a:ext cx="4762500" cy="223838"/>
           </a:xfrm>
           <a:prstGeom prst="rect">
             <a:avLst/>
@@ -169,13 +169,13 @@
           <a:lstStyle>
             <a:lvl1pPr marL="0" indent="0" algn="l">
               <a:lnSpc>
-                <a:spcPts val="2350"/>
+                <a:spcPts val="1762"/>
               </a:lnSpc>
               <a:spcBef>
                 <a:spcPts val="0"/>
               </a:spcBef>
               <a:buNone/>
-              <a:defRPr sz="1800" b="0">
+              <a:defRPr sz="1350" b="0">
                 <a:solidFill>
                   <a:srgbClr val="182232"/>
                 </a:solidFill>
@@ -205,8 +205,8 @@
         </p:nvSpPr>
         <p:spPr>
           <a:xfrm>
-            <a:off x="762000" y="1778000"/>
-            <a:ext cx="5334000" cy="1968500"/>
+            <a:off x="571500" y="1333500"/>
+            <a:ext cx="4000500" cy="1476375"/>
           </a:xfrm>
           <a:prstGeom prst="rect">
             <a:avLst/>
@@ -219,19 +219,19 @@
           <a:lstStyle>
             <a:lvl1pPr marL="0" indent="0" algn="l">
               <a:lnSpc>
-                <a:spcPts val="5050"/>
+                <a:spcPts val="3788"/>
               </a:lnSpc>
               <a:spcBef>
                 <a:spcPts val="0"/>
               </a:spcBef>
               <a:buNone/>
-              <a:defRPr sz="4800" b="0">
+              <a:defRPr sz="3600" b="1">
                 <a:solidFill>
                   <a:srgbClr val="182232"/>
                 </a:solidFill>
-                <a:latin typeface="PP Neue Machina Inktrap Smbold"/>
-                <a:ea typeface="PP Neue Machina Inktrap Smbold"/>
-                <a:cs typeface="PP Neue Machina Inktrap Smbold"/>
+                <a:latin typeface="Space Grotesk"/>
+                <a:ea typeface="Space Grotesk"/>
+                <a:cs typeface="Space Grotesk"/>
               </a:defRPr>
             </a:lvl1pPr>
           </a:lstStyle>
@@ -255,8 +255,8 @@
         </p:nvSpPr>
         <p:spPr>
           <a:xfrm>
-            <a:off x="762000" y="3962400"/>
-            <a:ext cx="5715000" cy="393700"/>
+            <a:off x="571500" y="2971800"/>
+            <a:ext cx="4286250" cy="295275"/>
           </a:xfrm>
           <a:prstGeom prst="rect">
             <a:avLst/>
@@ -269,13 +269,13 @@
           <a:lstStyle>
             <a:lvl1pPr marL="0" indent="0" algn="l">
               <a:lnSpc>
-                <a:spcPts val="3100"/>
+                <a:spcPts val="2325"/>
               </a:lnSpc>
               <a:spcBef>
                 <a:spcPts val="0"/>
               </a:spcBef>
               <a:buNone/>
-              <a:defRPr sz="2400" b="1">
+              <a:defRPr sz="1800" b="1">
                 <a:solidFill>
                   <a:srgbClr val="182232"/>
                 </a:solidFill>
@@ -305,8 +305,8 @@
         </p:nvSpPr>
         <p:spPr>
           <a:xfrm>
-            <a:off x="762000" y="4368800"/>
-            <a:ext cx="5715000" cy="298450"/>
+            <a:off x="571500" y="3276600"/>
+            <a:ext cx="4286250" cy="223838"/>
           </a:xfrm>
           <a:prstGeom prst="rect">
             <a:avLst/>
@@ -319,13 +319,13 @@
           <a:lstStyle>
             <a:lvl1pPr marL="0" indent="0" algn="l">
               <a:lnSpc>
-                <a:spcPts val="2350"/>
+                <a:spcPts val="1762"/>
               </a:lnSpc>
               <a:spcBef>
                 <a:spcPts val="0"/>
               </a:spcBef>
               <a:buNone/>
-              <a:defRPr sz="1800" b="0">
+              <a:defRPr sz="1350" b="0">
                 <a:solidFill>
                   <a:srgbClr val="182232"/>
                 </a:solidFill>
@@ -393,8 +393,8 @@
         </p:nvSpPr>
         <p:spPr>
           <a:xfrm>
-            <a:off x="762000" y="1270000"/>
-            <a:ext cx="6350000" cy="298450"/>
+            <a:off x="571500" y="952500"/>
+            <a:ext cx="4762500" cy="223838"/>
           </a:xfrm>
           <a:prstGeom prst="rect">
             <a:avLst/>
@@ -408,7 +408,157 @@
           <a:lstStyle>
             <a:lvl1pPr marL="0" indent="0" algn="l">
               <a:lnSpc>
-                <a:spcPts val="2350"/>
+                <a:spcPts val="1762"/>
+              </a:lnSpc>
+              <a:spcBef>
+                <a:spcPts val="0"/>
+              </a:spcBef>
+              <a:buNone/>
+              <a:defRPr sz="1350" b="0">
+                <a:solidFill>
+                  <a:srgbClr val="182232"/>
+                </a:solidFill>
+                <a:latin typeface="Space Grotesk"/>
+                <a:ea typeface="Space Grotesk"/>
+                <a:cs typeface="Space Grotesk"/>
+              </a:defRPr>
+            </a:lvl1pPr>
+          </a:lstStyle>
+          <a:p>
+            <a:r>
+              <a:rPr lang="en-US"/>
+              <a:t>Devcon 8 · Builder Enablement &amp; BuidlGuidl</a:t>
+            </a:r>
+          </a:p>
+        </p:txBody>
+      </p:sp>
+      <p:sp>
+        <p:nvSpPr>
+          <p:cNvPr id="139" name="Thanks"/>
+          <p:cNvSpPr>
+            <a:spLocks noGrp="1"/>
+          </p:cNvSpPr>
+          <p:nvPr>
+            <p:ph type="title"/>
+          </p:nvPr>
+        </p:nvSpPr>
+        <p:spPr>
+          <a:xfrm>
+            <a:off x="571500" y="1333500"/>
+            <a:ext cx="4000500" cy="523875"/>
+          </a:xfrm>
+          <a:prstGeom prst="rect">
+            <a:avLst/>
+          </a:prstGeom>
+        </p:spPr>
+        <p:txBody>
+          <a:bodyPr wrap="square" lIns="0" tIns="0" rIns="0" bIns="0" anchor="t">
+            <a:noAutofit/>
+          </a:bodyPr>
+          <a:lstStyle>
+            <a:lvl1pPr marL="0" indent="0" algn="l">
+              <a:lnSpc>
+                <a:spcPts val="3788"/>
+              </a:lnSpc>
+              <a:spcBef>
+                <a:spcPts val="0"/>
+              </a:spcBef>
+              <a:buNone/>
+              <a:defRPr sz="3600" b="1">
+                <a:solidFill>
+                  <a:srgbClr val="182232"/>
+                </a:solidFill>
+                <a:latin typeface="Space Grotesk"/>
+                <a:ea typeface="Space Grotesk"/>
+                <a:cs typeface="Space Grotesk"/>
+              </a:defRPr>
+            </a:lvl1pPr>
+          </a:lstStyle>
+          <a:p>
+            <a:r>
+              <a:rPr lang="en-US"/>
+              <a:t>Thanks</a:t>
+            </a:r>
+          </a:p>
+        </p:txBody>
+      </p:sp>
+      <p:sp>
+        <p:nvSpPr>
+          <p:cNvPr id="140" name="Speaker name"/>
+          <p:cNvSpPr>
+            <a:spLocks noGrp="1"/>
+          </p:cNvSpPr>
+          <p:nvPr>
+            <p:ph type="body" idx="1"/>
+          </p:nvPr>
+        </p:nvSpPr>
+        <p:spPr>
+          <a:xfrm>
+            <a:off x="571500" y="2095500"/>
+            <a:ext cx="4191000" cy="295275"/>
+          </a:xfrm>
+          <a:prstGeom prst="rect">
+            <a:avLst/>
+          </a:prstGeom>
+        </p:spPr>
+        <p:txBody>
+          <a:bodyPr wrap="square" lIns="0" tIns="0" rIns="0" bIns="0" anchor="t">
+            <a:noAutofit/>
+          </a:bodyPr>
+          <a:lstStyle>
+            <a:lvl1pPr marL="0" indent="0" algn="l">
+              <a:lnSpc>
+                <a:spcPts val="2325"/>
+              </a:lnSpc>
+              <a:spcBef>
+                <a:spcPts val="0"/>
+              </a:spcBef>
+              <a:buNone/>
+              <a:defRPr sz="1800" b="1">
+                <a:solidFill>
+                  <a:srgbClr val="182232"/>
+                </a:solidFill>
+                <a:latin typeface="Space Grotesk"/>
+                <a:ea typeface="Space Grotesk"/>
+                <a:cs typeface="Space Grotesk"/>
+              </a:defRPr>
+            </a:lvl1pPr>
+          </a:lstStyle>
+          <a:p>
+            <a:r>
+              <a:rPr lang="en-US"/>
+              <a:t>Speaker name</a:t>
+            </a:r>
+          </a:p>
+        </p:txBody>
+      </p:sp>
+      <p:sp>
+        <p:nvSpPr>
+          <p:cNvPr id="141" name="Handles"/>
+          <p:cNvSpPr>
+            <a:spLocks noGrp="1"/>
+          </p:cNvSpPr>
+          <p:nvPr>
+            <p:ph type="body" idx="2"/>
+          </p:nvPr>
+        </p:nvSpPr>
+        <p:spPr>
+          <a:xfrm>
+            <a:off x="571500" y="2400300"/>
+            <a:ext cx="4191000" cy="295275"/>
+          </a:xfrm>
+          <a:prstGeom prst="rect">
+            <a:avLst/>
+          </a:prstGeom>
+        </p:spPr>
+        <p:txBody>
+          <a:bodyPr wrap="square" lIns="0" tIns="0" rIns="0" bIns="0" anchor="t">
+            <a:noAutofit/>
+          </a:bodyPr>
+          <a:lstStyle>
+            <a:lvl1pPr marL="0" indent="0" algn="l">
+              <a:lnSpc>
+                <a:spcPts val="2325"/>
               </a:lnSpc>
               <a:spcBef>
                 <a:spcPts val="0"/>
@@ -427,25 +577,25 @@
           <a:p>
             <a:r>
               <a:rPr lang="en-US"/>
-              <a:t>Devcon 8 · Builder Enablement &amp; BuidlGuidl</a:t>
-            </a:r>
-          </a:p>
-        </p:txBody>
-      </p:sp>
-      <p:sp>
-        <p:nvSpPr>
-          <p:cNvPr id="139" name="Thanks"/>
-          <p:cNvSpPr>
-            <a:spLocks noGrp="1"/>
-          </p:cNvSpPr>
-          <p:nvPr>
-            <p:ph type="title"/>
-          </p:nvPr>
-        </p:nvSpPr>
-        <p:spPr>
-          <a:xfrm>
-            <a:off x="762000" y="1778000"/>
-            <a:ext cx="5334000" cy="698500"/>
+              <a:t>@handle on X and GitHub</a:t>
+            </a:r>
+          </a:p>
+        </p:txBody>
+      </p:sp>
+      <p:sp>
+        <p:nvSpPr>
+          <p:cNvPr id="142" name="Link"/>
+          <p:cNvSpPr>
+            <a:spLocks noGrp="1"/>
+          </p:cNvSpPr>
+          <p:nvPr>
+            <p:ph type="body" idx="3"/>
+          </p:nvPr>
+        </p:nvSpPr>
+        <p:spPr>
+          <a:xfrm>
+            <a:off x="571500" y="2781300"/>
+            <a:ext cx="4191000" cy="295275"/>
           </a:xfrm>
           <a:prstGeom prst="rect">
             <a:avLst/>
@@ -458,163 +608,13 @@
           <a:lstStyle>
             <a:lvl1pPr marL="0" indent="0" algn="l">
               <a:lnSpc>
-                <a:spcPts val="5050"/>
+                <a:spcPts val="2325"/>
               </a:lnSpc>
               <a:spcBef>
                 <a:spcPts val="0"/>
               </a:spcBef>
               <a:buNone/>
-              <a:defRPr sz="4800" b="0">
-                <a:solidFill>
-                  <a:srgbClr val="182232"/>
-                </a:solidFill>
-                <a:latin typeface="PP Neue Machina Inktrap Smbold"/>
-                <a:ea typeface="PP Neue Machina Inktrap Smbold"/>
-                <a:cs typeface="PP Neue Machina Inktrap Smbold"/>
-              </a:defRPr>
-            </a:lvl1pPr>
-          </a:lstStyle>
-          <a:p>
-            <a:r>
-              <a:rPr lang="en-US"/>
-              <a:t>Thanks</a:t>
-            </a:r>
-          </a:p>
-        </p:txBody>
-      </p:sp>
-      <p:sp>
-        <p:nvSpPr>
-          <p:cNvPr id="140" name="Speaker name"/>
-          <p:cNvSpPr>
-            <a:spLocks noGrp="1"/>
-          </p:cNvSpPr>
-          <p:nvPr>
-            <p:ph type="body" idx="1"/>
-          </p:nvPr>
-        </p:nvSpPr>
-        <p:spPr>
-          <a:xfrm>
-            <a:off x="762000" y="2794000"/>
-            <a:ext cx="5588000" cy="393700"/>
-          </a:xfrm>
-          <a:prstGeom prst="rect">
-            <a:avLst/>
-          </a:prstGeom>
-        </p:spPr>
-        <p:txBody>
-          <a:bodyPr wrap="square" lIns="0" tIns="0" rIns="0" bIns="0" anchor="t">
-            <a:noAutofit/>
-          </a:bodyPr>
-          <a:lstStyle>
-            <a:lvl1pPr marL="0" indent="0" algn="l">
-              <a:lnSpc>
-                <a:spcPts val="3100"/>
-              </a:lnSpc>
-              <a:spcBef>
-                <a:spcPts val="0"/>
-              </a:spcBef>
-              <a:buNone/>
-              <a:defRPr sz="2400" b="1">
-                <a:solidFill>
-                  <a:srgbClr val="182232"/>
-                </a:solidFill>
-                <a:latin typeface="Space Grotesk"/>
-                <a:ea typeface="Space Grotesk"/>
-                <a:cs typeface="Space Grotesk"/>
-              </a:defRPr>
-            </a:lvl1pPr>
-          </a:lstStyle>
-          <a:p>
-            <a:r>
-              <a:rPr lang="en-US"/>
-              <a:t>Speaker name</a:t>
-            </a:r>
-          </a:p>
-        </p:txBody>
-      </p:sp>
-      <p:sp>
-        <p:nvSpPr>
-          <p:cNvPr id="141" name="Handles"/>
-          <p:cNvSpPr>
-            <a:spLocks noGrp="1"/>
-          </p:cNvSpPr>
-          <p:nvPr>
-            <p:ph type="body" idx="2"/>
-          </p:nvPr>
-        </p:nvSpPr>
-        <p:spPr>
-          <a:xfrm>
-            <a:off x="762000" y="3200400"/>
-            <a:ext cx="5588000" cy="393700"/>
-          </a:xfrm>
-          <a:prstGeom prst="rect">
-            <a:avLst/>
-          </a:prstGeom>
-        </p:spPr>
-        <p:txBody>
-          <a:bodyPr wrap="square" lIns="0" tIns="0" rIns="0" bIns="0" anchor="t">
-            <a:noAutofit/>
-          </a:bodyPr>
-          <a:lstStyle>
-            <a:lvl1pPr marL="0" indent="0" algn="l">
-              <a:lnSpc>
-                <a:spcPts val="3100"/>
-              </a:lnSpc>
-              <a:spcBef>
-                <a:spcPts val="0"/>
-              </a:spcBef>
-              <a:buNone/>
-              <a:defRPr sz="2400" b="0">
-                <a:solidFill>
-                  <a:srgbClr val="182232"/>
-                </a:solidFill>
-                <a:latin typeface="Space Grotesk"/>
-                <a:ea typeface="Space Grotesk"/>
-                <a:cs typeface="Space Grotesk"/>
-              </a:defRPr>
-            </a:lvl1pPr>
-          </a:lstStyle>
-          <a:p>
-            <a:r>
-              <a:rPr lang="en-US"/>
-              <a:t>@handle on X and GitHub</a:t>
-            </a:r>
-          </a:p>
-        </p:txBody>
-      </p:sp>
-      <p:sp>
-        <p:nvSpPr>
-          <p:cNvPr id="142" name="Link"/>
-          <p:cNvSpPr>
-            <a:spLocks noGrp="1"/>
-          </p:cNvSpPr>
-          <p:nvPr>
-            <p:ph type="body" idx="3"/>
-          </p:nvPr>
-        </p:nvSpPr>
-        <p:spPr>
-          <a:xfrm>
-            <a:off x="762000" y="3708400"/>
-            <a:ext cx="5588000" cy="393700"/>
-          </a:xfrm>
-          <a:prstGeom prst="rect">
-            <a:avLst/>
-          </a:prstGeom>
-        </p:spPr>
-        <p:txBody>
-          <a:bodyPr wrap="square" lIns="0" tIns="0" rIns="0" bIns="0" anchor="t">
-            <a:noAutofit/>
-          </a:bodyPr>
-          <a:lstStyle>
-            <a:lvl1pPr marL="0" indent="0" algn="l">
-              <a:lnSpc>
-                <a:spcPts val="3100"/>
-              </a:lnSpc>
-              <a:spcBef>
-                <a:spcPts val="0"/>
-              </a:spcBef>
-              <a:buNone/>
-              <a:defRPr sz="2400" b="0">
+              <a:defRPr sz="1800" b="0">
                 <a:solidFill>
                   <a:srgbClr val="182232"/>
                 </a:solidFill>
@@ -682,8 +682,8 @@
         </p:nvSpPr>
         <p:spPr>
           <a:xfrm>
-            <a:off x="762000" y="1270000"/>
-            <a:ext cx="6350000" cy="298450"/>
+            <a:off x="571500" y="952500"/>
+            <a:ext cx="4762500" cy="223838"/>
           </a:xfrm>
           <a:prstGeom prst="rect">
             <a:avLst/>
@@ -697,163 +697,163 @@
           <a:lstStyle>
             <a:lvl1pPr marL="0" indent="0" algn="l">
               <a:lnSpc>
-                <a:spcPts val="2350"/>
+                <a:spcPts val="1762"/>
+              </a:lnSpc>
+              <a:spcBef>
+                <a:spcPts val="0"/>
+              </a:spcBef>
+              <a:buNone/>
+              <a:defRPr sz="1350" b="0">
+                <a:solidFill>
+                  <a:srgbClr val="182232"/>
+                </a:solidFill>
+                <a:latin typeface="Space Grotesk"/>
+                <a:ea typeface="Space Grotesk"/>
+                <a:cs typeface="Space Grotesk"/>
+              </a:defRPr>
+            </a:lvl1pPr>
+          </a:lstStyle>
+          <a:p>
+            <a:r>
+              <a:rPr lang="en-US"/>
+              <a:t>Up next</a:t>
+            </a:r>
+          </a:p>
+        </p:txBody>
+      </p:sp>
+      <p:sp>
+        <p:nvSpPr>
+          <p:cNvPr id="144" name="Talk title"/>
+          <p:cNvSpPr>
+            <a:spLocks noGrp="1"/>
+          </p:cNvSpPr>
+          <p:nvPr>
+            <p:ph type="title"/>
+          </p:nvPr>
+        </p:nvSpPr>
+        <p:spPr>
+          <a:xfrm>
+            <a:off x="571500" y="1333500"/>
+            <a:ext cx="4000500" cy="1476375"/>
+          </a:xfrm>
+          <a:prstGeom prst="rect">
+            <a:avLst/>
+          </a:prstGeom>
+        </p:spPr>
+        <p:txBody>
+          <a:bodyPr wrap="square" lIns="0" tIns="0" rIns="0" bIns="0" anchor="t">
+            <a:noAutofit/>
+          </a:bodyPr>
+          <a:lstStyle>
+            <a:lvl1pPr marL="0" indent="0" algn="l">
+              <a:lnSpc>
+                <a:spcPts val="3788"/>
+              </a:lnSpc>
+              <a:spcBef>
+                <a:spcPts val="0"/>
+              </a:spcBef>
+              <a:buNone/>
+              <a:defRPr sz="3600" b="1">
+                <a:solidFill>
+                  <a:srgbClr val="182232"/>
+                </a:solidFill>
+                <a:latin typeface="Space Grotesk"/>
+                <a:ea typeface="Space Grotesk"/>
+                <a:cs typeface="Space Grotesk"/>
+              </a:defRPr>
+            </a:lvl1pPr>
+          </a:lstStyle>
+          <a:p>
+            <a:r>
+              <a:rPr lang="en-US"/>
+              <a:t>Talk title</a:t>
+            </a:r>
+          </a:p>
+        </p:txBody>
+      </p:sp>
+      <p:sp>
+        <p:nvSpPr>
+          <p:cNvPr id="145" name="Speaker"/>
+          <p:cNvSpPr>
+            <a:spLocks noGrp="1"/>
+          </p:cNvSpPr>
+          <p:nvPr>
+            <p:ph type="body" idx="1"/>
+          </p:nvPr>
+        </p:nvSpPr>
+        <p:spPr>
+          <a:xfrm>
+            <a:off x="571500" y="2971800"/>
+            <a:ext cx="4286250" cy="295275"/>
+          </a:xfrm>
+          <a:prstGeom prst="rect">
+            <a:avLst/>
+          </a:prstGeom>
+        </p:spPr>
+        <p:txBody>
+          <a:bodyPr wrap="square" lIns="0" tIns="0" rIns="0" bIns="0" anchor="t">
+            <a:noAutofit/>
+          </a:bodyPr>
+          <a:lstStyle>
+            <a:lvl1pPr marL="0" indent="0" algn="l">
+              <a:lnSpc>
+                <a:spcPts val="2325"/>
+              </a:lnSpc>
+              <a:spcBef>
+                <a:spcPts val="0"/>
+              </a:spcBef>
+              <a:buNone/>
+              <a:defRPr sz="1800" b="1">
+                <a:solidFill>
+                  <a:srgbClr val="182232"/>
+                </a:solidFill>
+                <a:latin typeface="Space Grotesk"/>
+                <a:ea typeface="Space Grotesk"/>
+                <a:cs typeface="Space Grotesk"/>
+              </a:defRPr>
+            </a:lvl1pPr>
+          </a:lstStyle>
+          <a:p>
+            <a:r>
+              <a:rPr lang="en-US"/>
+              <a:t>Speaker, affiliation</a:t>
+            </a:r>
+          </a:p>
+        </p:txBody>
+      </p:sp>
+      <p:sp>
+        <p:nvSpPr>
+          <p:cNvPr id="146" name="Time and room"/>
+          <p:cNvSpPr>
+            <a:spLocks noGrp="1"/>
+          </p:cNvSpPr>
+          <p:nvPr>
+            <p:ph type="body" idx="2"/>
+          </p:nvPr>
+        </p:nvSpPr>
+        <p:spPr>
+          <a:xfrm>
+            <a:off x="571500" y="3276600"/>
+            <a:ext cx="4286250" cy="295275"/>
+          </a:xfrm>
+          <a:prstGeom prst="rect">
+            <a:avLst/>
+          </a:prstGeom>
+        </p:spPr>
+        <p:txBody>
+          <a:bodyPr wrap="square" lIns="0" tIns="0" rIns="0" bIns="0" anchor="t">
+            <a:noAutofit/>
+          </a:bodyPr>
+          <a:lstStyle>
+            <a:lvl1pPr marL="0" indent="0" algn="l">
+              <a:lnSpc>
+                <a:spcPts val="2325"/>
               </a:lnSpc>
               <a:spcBef>
                 <a:spcPts val="0"/>
               </a:spcBef>
               <a:buNone/>
               <a:defRPr sz="1800" b="0">
-                <a:solidFill>
-                  <a:srgbClr val="182232"/>
-                </a:solidFill>
-                <a:latin typeface="Space Grotesk"/>
-                <a:ea typeface="Space Grotesk"/>
-                <a:cs typeface="Space Grotesk"/>
-              </a:defRPr>
-            </a:lvl1pPr>
-          </a:lstStyle>
-          <a:p>
-            <a:r>
-              <a:rPr lang="en-US"/>
-              <a:t>Up next</a:t>
-            </a:r>
-          </a:p>
-        </p:txBody>
-      </p:sp>
-      <p:sp>
-        <p:nvSpPr>
-          <p:cNvPr id="144" name="Talk title"/>
-          <p:cNvSpPr>
-            <a:spLocks noGrp="1"/>
-          </p:cNvSpPr>
-          <p:nvPr>
-            <p:ph type="title"/>
-          </p:nvPr>
-        </p:nvSpPr>
-        <p:spPr>
-          <a:xfrm>
-            <a:off x="762000" y="1778000"/>
-            <a:ext cx="5334000" cy="1968500"/>
-          </a:xfrm>
-          <a:prstGeom prst="rect">
-            <a:avLst/>
-          </a:prstGeom>
-        </p:spPr>
-        <p:txBody>
-          <a:bodyPr wrap="square" lIns="0" tIns="0" rIns="0" bIns="0" anchor="t">
-            <a:noAutofit/>
-          </a:bodyPr>
-          <a:lstStyle>
-            <a:lvl1pPr marL="0" indent="0" algn="l">
-              <a:lnSpc>
-                <a:spcPts val="5050"/>
-              </a:lnSpc>
-              <a:spcBef>
-                <a:spcPts val="0"/>
-              </a:spcBef>
-              <a:buNone/>
-              <a:defRPr sz="4800" b="0">
-                <a:solidFill>
-                  <a:srgbClr val="182232"/>
-                </a:solidFill>
-                <a:latin typeface="PP Neue Machina Inktrap Smbold"/>
-                <a:ea typeface="PP Neue Machina Inktrap Smbold"/>
-                <a:cs typeface="PP Neue Machina Inktrap Smbold"/>
-              </a:defRPr>
-            </a:lvl1pPr>
-          </a:lstStyle>
-          <a:p>
-            <a:r>
-              <a:rPr lang="en-US"/>
-              <a:t>Talk title</a:t>
-            </a:r>
-          </a:p>
-        </p:txBody>
-      </p:sp>
-      <p:sp>
-        <p:nvSpPr>
-          <p:cNvPr id="145" name="Speaker"/>
-          <p:cNvSpPr>
-            <a:spLocks noGrp="1"/>
-          </p:cNvSpPr>
-          <p:nvPr>
-            <p:ph type="body" idx="1"/>
-          </p:nvPr>
-        </p:nvSpPr>
-        <p:spPr>
-          <a:xfrm>
-            <a:off x="762000" y="3962400"/>
-            <a:ext cx="5715000" cy="393700"/>
-          </a:xfrm>
-          <a:prstGeom prst="rect">
-            <a:avLst/>
-          </a:prstGeom>
-        </p:spPr>
-        <p:txBody>
-          <a:bodyPr wrap="square" lIns="0" tIns="0" rIns="0" bIns="0" anchor="t">
-            <a:noAutofit/>
-          </a:bodyPr>
-          <a:lstStyle>
-            <a:lvl1pPr marL="0" indent="0" algn="l">
-              <a:lnSpc>
-                <a:spcPts val="3100"/>
-              </a:lnSpc>
-              <a:spcBef>
-                <a:spcPts val="0"/>
-              </a:spcBef>
-              <a:buNone/>
-              <a:defRPr sz="2400" b="1">
-                <a:solidFill>
-                  <a:srgbClr val="182232"/>
-                </a:solidFill>
-                <a:latin typeface="Space Grotesk"/>
-                <a:ea typeface="Space Grotesk"/>
-                <a:cs typeface="Space Grotesk"/>
-              </a:defRPr>
-            </a:lvl1pPr>
-          </a:lstStyle>
-          <a:p>
-            <a:r>
-              <a:rPr lang="en-US"/>
-              <a:t>Speaker, affiliation</a:t>
-            </a:r>
-          </a:p>
-        </p:txBody>
-      </p:sp>
-      <p:sp>
-        <p:nvSpPr>
-          <p:cNvPr id="146" name="Time and room"/>
-          <p:cNvSpPr>
-            <a:spLocks noGrp="1"/>
-          </p:cNvSpPr>
-          <p:nvPr>
-            <p:ph type="body" idx="2"/>
-          </p:nvPr>
-        </p:nvSpPr>
-        <p:spPr>
-          <a:xfrm>
-            <a:off x="762000" y="4368800"/>
-            <a:ext cx="5715000" cy="393700"/>
-          </a:xfrm>
-          <a:prstGeom prst="rect">
-            <a:avLst/>
-          </a:prstGeom>
-        </p:spPr>
-        <p:txBody>
-          <a:bodyPr wrap="square" lIns="0" tIns="0" rIns="0" bIns="0" anchor="t">
-            <a:noAutofit/>
-          </a:bodyPr>
-          <a:lstStyle>
-            <a:lvl1pPr marL="0" indent="0" algn="l">
-              <a:lnSpc>
-                <a:spcPts val="3100"/>
-              </a:lnSpc>
-              <a:spcBef>
-                <a:spcPts val="0"/>
-              </a:spcBef>
-              <a:buNone/>
-              <a:defRPr sz="2400" b="0">
                 <a:solidFill>
                   <a:srgbClr val="182232"/>
                 </a:solidFill>
@@ -925,8 +925,8 @@
         </p:nvSpPr>
         <p:spPr>
           <a:xfrm>
-            <a:off x="762000" y="1905000"/>
-            <a:ext cx="10668000" cy="2540000"/>
+            <a:off x="571500" y="1428750"/>
+            <a:ext cx="8001000" cy="1905000"/>
           </a:xfrm>
           <a:prstGeom prst="rect">
             <a:avLst/>
@@ -939,19 +939,19 @@
           <a:lstStyle>
             <a:lvl1pPr marL="0" indent="0" algn="l">
               <a:lnSpc>
-                <a:spcPts val="6300"/>
+                <a:spcPts val="4725"/>
               </a:lnSpc>
               <a:spcBef>
                 <a:spcPts val="0"/>
               </a:spcBef>
               <a:buNone/>
-              <a:defRPr sz="6000" b="0">
+              <a:defRPr sz="4500" b="1">
                 <a:solidFill>
                   <a:srgbClr val="182232"/>
                 </a:solidFill>
-                <a:latin typeface="PP Neue Machina Inktrap Smbold"/>
-                <a:ea typeface="PP Neue Machina Inktrap Smbold"/>
-                <a:cs typeface="PP Neue Machina Inktrap Smbold"/>
+                <a:latin typeface="Space Grotesk"/>
+                <a:ea typeface="Space Grotesk"/>
+                <a:cs typeface="Space Grotesk"/>
               </a:defRPr>
             </a:lvl1pPr>
           </a:lstStyle>
@@ -975,8 +975,8 @@
         </p:nvSpPr>
         <p:spPr>
           <a:xfrm>
-            <a:off x="762000" y="4826000"/>
-            <a:ext cx="10668000" cy="393700"/>
+            <a:off x="571500" y="3619500"/>
+            <a:ext cx="8001000" cy="295275"/>
           </a:xfrm>
           <a:prstGeom prst="rect">
             <a:avLst/>
@@ -989,13 +989,13 @@
           <a:lstStyle>
             <a:lvl1pPr marL="0" indent="0" algn="l">
               <a:lnSpc>
-                <a:spcPts val="3100"/>
+                <a:spcPts val="2325"/>
               </a:lnSpc>
               <a:spcBef>
                 <a:spcPts val="0"/>
               </a:spcBef>
               <a:buNone/>
-              <a:defRPr sz="2400" b="0">
+              <a:defRPr sz="1800" b="0">
                 <a:solidFill>
                   <a:srgbClr val="182232"/>
                 </a:solidFill>
@@ -1067,8 +1067,8 @@
         </p:nvSpPr>
         <p:spPr>
           <a:xfrm>
-            <a:off x="762000" y="609600"/>
-            <a:ext cx="10668000" cy="1117600"/>
+            <a:off x="571500" y="457200"/>
+            <a:ext cx="8001000" cy="838200"/>
           </a:xfrm>
           <a:prstGeom prst="rect">
             <a:avLst/>
@@ -1081,19 +1081,19 @@
           <a:lstStyle>
             <a:lvl1pPr marL="0" indent="0" algn="l">
               <a:lnSpc>
-                <a:spcPts val="4400"/>
+                <a:spcPts val="3300"/>
               </a:lnSpc>
               <a:spcBef>
                 <a:spcPts val="0"/>
               </a:spcBef>
               <a:buNone/>
-              <a:defRPr sz="4000" b="0">
+              <a:defRPr sz="3000" b="1">
                 <a:solidFill>
                   <a:srgbClr val="182232"/>
                 </a:solidFill>
-                <a:latin typeface="PP Neue Machina Inktrap Smbold"/>
-                <a:ea typeface="PP Neue Machina Inktrap Smbold"/>
-                <a:cs typeface="PP Neue Machina Inktrap Smbold"/>
+                <a:latin typeface="Space Grotesk"/>
+                <a:ea typeface="Space Grotesk"/>
+                <a:cs typeface="Space Grotesk"/>
               </a:defRPr>
             </a:lvl1pPr>
           </a:lstStyle>
@@ -1117,8 +1117,8 @@
         </p:nvSpPr>
         <p:spPr>
           <a:xfrm>
-            <a:off x="762000" y="2032000"/>
-            <a:ext cx="10668000" cy="4216400"/>
+            <a:off x="571500" y="1524000"/>
+            <a:ext cx="8001000" cy="3162300"/>
           </a:xfrm>
           <a:prstGeom prst="rect">
             <a:avLst/>
@@ -1129,12 +1129,12 @@
             <a:noAutofit/>
           </a:bodyPr>
           <a:lstStyle>
-            <a:lvl1pPr marL="406400" indent="-406400" algn="l">
+            <a:lvl1pPr marL="304800" indent="-304800" algn="l">
               <a:lnSpc>
-                <a:spcPts val="3100"/>
+                <a:spcPts val="2325"/>
               </a:lnSpc>
               <a:spcBef>
-                <a:spcPts val="1600"/>
+                <a:spcPts val="1200"/>
               </a:spcBef>
               <a:buClr>
                 <a:srgbClr val="808CFF"/>
@@ -1142,7 +1142,7 @@
               <a:buSzPct val="80000"/>
               <a:buFont typeface="Arial"/>
               <a:buChar char="●"/>
-              <a:defRPr sz="2400" b="0">
+              <a:defRPr sz="1800" b="0">
                 <a:solidFill>
                   <a:srgbClr val="182232"/>
                 </a:solidFill>
@@ -1214,8 +1214,8 @@
         </p:nvSpPr>
         <p:spPr>
           <a:xfrm>
-            <a:off x="762000" y="609600"/>
-            <a:ext cx="10668000" cy="609600"/>
+            <a:off x="571500" y="457200"/>
+            <a:ext cx="8001000" cy="457200"/>
           </a:xfrm>
           <a:prstGeom prst="rect">
             <a:avLst/>
@@ -1228,19 +1228,19 @@
           <a:lstStyle>
             <a:lvl1pPr marL="0" indent="0" algn="l">
               <a:lnSpc>
-                <a:spcPts val="4400"/>
+                <a:spcPts val="3300"/>
               </a:lnSpc>
               <a:spcBef>
                 <a:spcPts val="0"/>
               </a:spcBef>
               <a:buNone/>
-              <a:defRPr sz="4000" b="0">
+              <a:defRPr sz="3000" b="1">
                 <a:solidFill>
                   <a:srgbClr val="182232"/>
                 </a:solidFill>
-                <a:latin typeface="PP Neue Machina Inktrap Smbold"/>
-                <a:ea typeface="PP Neue Machina Inktrap Smbold"/>
-                <a:cs typeface="PP Neue Machina Inktrap Smbold"/>
+                <a:latin typeface="Space Grotesk"/>
+                <a:ea typeface="Space Grotesk"/>
+                <a:cs typeface="Space Grotesk"/>
               </a:defRPr>
             </a:lvl1pPr>
           </a:lstStyle>
@@ -1260,8 +1260,8 @@
         </p:nvSpPr>
         <p:spPr>
           <a:xfrm>
-            <a:off x="762000" y="1473200"/>
-            <a:ext cx="10668000" cy="4775200"/>
+            <a:off x="571500" y="1104900"/>
+            <a:ext cx="8001000" cy="3581400"/>
           </a:xfrm>
           <a:prstGeom prst="roundRect">
             <a:avLst>
@@ -1293,8 +1293,8 @@
         </p:nvSpPr>
         <p:spPr>
           <a:xfrm>
-            <a:off x="1016000" y="1727200"/>
-            <a:ext cx="10160000" cy="4267200"/>
+            <a:off x="762000" y="1295400"/>
+            <a:ext cx="7620000" cy="3200400"/>
           </a:xfrm>
           <a:prstGeom prst="rect">
             <a:avLst/>
@@ -1355,8 +1355,8 @@
         </p:nvSpPr>
         <p:spPr>
           <a:xfrm>
-            <a:off x="762000" y="609600"/>
-            <a:ext cx="10668000" cy="609600"/>
+            <a:off x="571500" y="457200"/>
+            <a:ext cx="8001000" cy="457200"/>
           </a:xfrm>
           <a:prstGeom prst="rect">
             <a:avLst/>
@@ -1369,19 +1369,19 @@
           <a:lstStyle>
             <a:lvl1pPr marL="0" indent="0" algn="l">
               <a:lnSpc>
-                <a:spcPts val="4400"/>
+                <a:spcPts val="3300"/>
               </a:lnSpc>
               <a:spcBef>
                 <a:spcPts val="0"/>
               </a:spcBef>
               <a:buNone/>
-              <a:defRPr sz="4000" b="0">
+              <a:defRPr sz="3000" b="1">
                 <a:solidFill>
                   <a:srgbClr val="182232"/>
                 </a:solidFill>
-                <a:latin typeface="PP Neue Machina Inktrap Smbold"/>
-                <a:ea typeface="PP Neue Machina Inktrap Smbold"/>
-                <a:cs typeface="PP Neue Machina Inktrap Smbold"/>
+                <a:latin typeface="Space Grotesk"/>
+                <a:ea typeface="Space Grotesk"/>
+                <a:cs typeface="Space Grotesk"/>
               </a:defRPr>
             </a:lvl1pPr>
           </a:lstStyle>
@@ -1401,8 +1401,8 @@
         </p:nvSpPr>
         <p:spPr>
           <a:xfrm>
-            <a:off x="762000" y="1651000"/>
-            <a:ext cx="3352800" cy="3302000"/>
+            <a:off x="571500" y="1238250"/>
+            <a:ext cx="2514600" cy="2476500"/>
           </a:xfrm>
           <a:prstGeom prst="roundRect">
             <a:avLst>
@@ -1430,8 +1430,8 @@
         </p:nvSpPr>
         <p:spPr>
           <a:xfrm>
-            <a:off x="1066800" y="1955800"/>
-            <a:ext cx="609600" cy="406400"/>
+            <a:off x="800100" y="1466850"/>
+            <a:ext cx="457200" cy="304800"/>
           </a:xfrm>
           <a:prstGeom prst="roundRect">
             <a:avLst>
@@ -1459,8 +1459,8 @@
         </p:nvSpPr>
         <p:spPr>
           <a:xfrm>
-            <a:off x="1066800" y="2044700"/>
-            <a:ext cx="609600" cy="254000"/>
+            <a:off x="800100" y="1533525"/>
+            <a:ext cx="457200" cy="190500"/>
           </a:xfrm>
           <a:prstGeom prst="rect">
             <a:avLst/>
@@ -1474,7 +1474,107 @@
           <a:lstStyle>
             <a:lvl1pPr marL="0" indent="0" algn="ctr">
               <a:lnSpc>
-                <a:spcPts val="2350"/>
+                <a:spcPts val="1762"/>
+              </a:lnSpc>
+              <a:spcBef>
+                <a:spcPts val="0"/>
+              </a:spcBef>
+              <a:buNone/>
+              <a:defRPr sz="1350" b="0">
+                <a:solidFill>
+                  <a:srgbClr val="182232"/>
+                </a:solidFill>
+                <a:latin typeface="Space Grotesk"/>
+                <a:ea typeface="Space Grotesk"/>
+                <a:cs typeface="Space Grotesk"/>
+              </a:defRPr>
+            </a:lvl1pPr>
+          </a:lstStyle>
+          <a:p>
+            <a:r>
+              <a:rPr lang="en-US"/>
+              <a:t>01</a:t>
+            </a:r>
+          </a:p>
+        </p:txBody>
+      </p:sp>
+      <p:sp>
+        <p:nvSpPr>
+          <p:cNvPr id="116" name="Column 1 title"/>
+          <p:cNvSpPr>
+            <a:spLocks noGrp="1"/>
+          </p:cNvSpPr>
+          <p:nvPr>
+            <p:ph type="body" idx="1"/>
+          </p:nvPr>
+        </p:nvSpPr>
+        <p:spPr>
+          <a:xfrm>
+            <a:off x="800100" y="1924050"/>
+            <a:ext cx="2057400" cy="571500"/>
+          </a:xfrm>
+          <a:prstGeom prst="rect">
+            <a:avLst/>
+          </a:prstGeom>
+        </p:spPr>
+        <p:txBody>
+          <a:bodyPr wrap="square" lIns="0" tIns="0" rIns="0" bIns="0" anchor="t">
+            <a:noAutofit/>
+          </a:bodyPr>
+          <a:lstStyle>
+            <a:lvl1pPr marL="0" indent="0" algn="l">
+              <a:lnSpc>
+                <a:spcPts val="2325"/>
+              </a:lnSpc>
+              <a:spcBef>
+                <a:spcPts val="0"/>
+              </a:spcBef>
+              <a:buNone/>
+              <a:defRPr sz="1800" b="1">
+                <a:solidFill>
+                  <a:srgbClr val="182232"/>
+                </a:solidFill>
+                <a:latin typeface="Space Grotesk"/>
+                <a:ea typeface="Space Grotesk"/>
+                <a:cs typeface="Space Grotesk"/>
+              </a:defRPr>
+            </a:lvl1pPr>
+          </a:lstStyle>
+          <a:p>
+            <a:r>
+              <a:rPr lang="en-US"/>
+              <a:t>Column title</a:t>
+            </a:r>
+          </a:p>
+        </p:txBody>
+      </p:sp>
+      <p:sp>
+        <p:nvSpPr>
+          <p:cNvPr id="117" name="Column 1 text"/>
+          <p:cNvSpPr>
+            <a:spLocks noGrp="1"/>
+          </p:cNvSpPr>
+          <p:nvPr>
+            <p:ph type="body" idx="2"/>
+          </p:nvPr>
+        </p:nvSpPr>
+        <p:spPr>
+          <a:xfrm>
+            <a:off x="800100" y="2590800"/>
+            <a:ext cx="2057400" cy="952500"/>
+          </a:xfrm>
+          <a:prstGeom prst="rect">
+            <a:avLst/>
+          </a:prstGeom>
+        </p:spPr>
+        <p:txBody>
+          <a:bodyPr wrap="square" lIns="0" tIns="0" rIns="0" bIns="0" anchor="t">
+            <a:noAutofit/>
+          </a:bodyPr>
+          <a:lstStyle>
+            <a:lvl1pPr marL="0" indent="0" algn="l">
+              <a:lnSpc>
+                <a:spcPts val="2325"/>
               </a:lnSpc>
               <a:spcBef>
                 <a:spcPts val="0"/>
@@ -1493,25 +1593,130 @@
           <a:p>
             <a:r>
               <a:rPr lang="en-US"/>
-              <a:t>01</a:t>
-            </a:r>
-          </a:p>
-        </p:txBody>
-      </p:sp>
-      <p:sp>
-        <p:nvSpPr>
-          <p:cNvPr id="116" name="Column 1 title"/>
-          <p:cNvSpPr>
-            <a:spLocks noGrp="1"/>
-          </p:cNvSpPr>
-          <p:nvPr>
-            <p:ph type="body" idx="1"/>
-          </p:nvPr>
-        </p:nvSpPr>
-        <p:spPr>
-          <a:xfrm>
-            <a:off x="1066800" y="2565400"/>
-            <a:ext cx="2743200" cy="762000"/>
+              <a:t>One or two short lines</a:t>
+            </a:r>
+          </a:p>
+        </p:txBody>
+      </p:sp>
+      <p:sp>
+        <p:nvSpPr>
+          <p:cNvPr id="118" name="Card 2"/>
+          <p:cNvSpPr/>
+          <p:nvPr/>
+        </p:nvSpPr>
+        <p:spPr>
+          <a:xfrm>
+            <a:off x="3314700" y="1238250"/>
+            <a:ext cx="2514600" cy="2476500"/>
+          </a:xfrm>
+          <a:prstGeom prst="roundRect">
+            <a:avLst>
+              <a:gd name="adj" fmla="val 3077"/>
+            </a:avLst>
+          </a:prstGeom>
+          <a:solidFill>
+            <a:srgbClr val="F4F4F4"/>
+          </a:solidFill>
+          <a:ln>
+            <a:noFill/>
+          </a:ln>
+        </p:spPr>
+        <p:txBody>
+          <a:bodyPr/>
+          <a:lstStyle/>
+          <a:p/>
+        </p:txBody>
+      </p:sp>
+      <p:sp>
+        <p:nvSpPr>
+          <p:cNvPr id="119" name="Pill 2"/>
+          <p:cNvSpPr/>
+          <p:nvPr/>
+        </p:nvSpPr>
+        <p:spPr>
+          <a:xfrm>
+            <a:off x="3543300" y="1466850"/>
+            <a:ext cx="457200" cy="304800"/>
+          </a:xfrm>
+          <a:prstGeom prst="roundRect">
+            <a:avLst>
+              <a:gd name="adj" fmla="val 25000"/>
+            </a:avLst>
+          </a:prstGeom>
+          <a:solidFill>
+            <a:srgbClr val="FF6E1D"/>
+          </a:solidFill>
+          <a:ln>
+            <a:noFill/>
+          </a:ln>
+        </p:spPr>
+        <p:txBody>
+          <a:bodyPr/>
+          <a:lstStyle/>
+          <a:p/>
+        </p:txBody>
+      </p:sp>
+      <p:sp>
+        <p:nvSpPr>
+          <p:cNvPr id="120" name="Pill number 2"/>
+          <p:cNvSpPr txBox="1"/>
+          <p:nvPr/>
+        </p:nvSpPr>
+        <p:spPr>
+          <a:xfrm>
+            <a:off x="3543300" y="1533525"/>
+            <a:ext cx="457200" cy="190500"/>
+          </a:xfrm>
+          <a:prstGeom prst="rect">
+            <a:avLst/>
+          </a:prstGeom>
+          <a:noFill/>
+        </p:spPr>
+        <p:txBody>
+          <a:bodyPr wrap="square" lIns="0" tIns="0" rIns="0" bIns="0" anchor="t">
+            <a:noAutofit/>
+          </a:bodyPr>
+          <a:lstStyle>
+            <a:lvl1pPr marL="0" indent="0" algn="ctr">
+              <a:lnSpc>
+                <a:spcPts val="1762"/>
+              </a:lnSpc>
+              <a:spcBef>
+                <a:spcPts val="0"/>
+              </a:spcBef>
+              <a:buNone/>
+              <a:defRPr sz="1350" b="0">
+                <a:solidFill>
+                  <a:srgbClr val="182232"/>
+                </a:solidFill>
+                <a:latin typeface="Space Grotesk"/>
+                <a:ea typeface="Space Grotesk"/>
+                <a:cs typeface="Space Grotesk"/>
+              </a:defRPr>
+            </a:lvl1pPr>
+          </a:lstStyle>
+          <a:p>
+            <a:r>
+              <a:rPr lang="en-US"/>
+              <a:t>02</a:t>
+            </a:r>
+          </a:p>
+        </p:txBody>
+      </p:sp>
+      <p:sp>
+        <p:nvSpPr>
+          <p:cNvPr id="121" name="Column 2 title"/>
+          <p:cNvSpPr>
+            <a:spLocks noGrp="1"/>
+          </p:cNvSpPr>
+          <p:nvPr>
+            <p:ph type="body" idx="3"/>
+          </p:nvPr>
+        </p:nvSpPr>
+        <p:spPr>
+          <a:xfrm>
+            <a:off x="3543300" y="1924050"/>
+            <a:ext cx="2057400" cy="571500"/>
           </a:xfrm>
           <a:prstGeom prst="rect">
             <a:avLst/>
@@ -1524,13 +1729,13 @@
           <a:lstStyle>
             <a:lvl1pPr marL="0" indent="0" algn="l">
               <a:lnSpc>
-                <a:spcPts val="3100"/>
+                <a:spcPts val="2325"/>
               </a:lnSpc>
               <a:spcBef>
                 <a:spcPts val="0"/>
               </a:spcBef>
               <a:buNone/>
-              <a:defRPr sz="2400" b="1">
+              <a:defRPr sz="1800" b="1">
                 <a:solidFill>
                   <a:srgbClr val="182232"/>
                 </a:solidFill>
@@ -1550,18 +1755,18 @@
       </p:sp>
       <p:sp>
         <p:nvSpPr>
-          <p:cNvPr id="117" name="Column 1 text"/>
-          <p:cNvSpPr>
-            <a:spLocks noGrp="1"/>
-          </p:cNvSpPr>
-          <p:nvPr>
-            <p:ph type="body" idx="2"/>
-          </p:nvPr>
-        </p:nvSpPr>
-        <p:spPr>
-          <a:xfrm>
-            <a:off x="1066800" y="3454400"/>
-            <a:ext cx="2743200" cy="1270000"/>
+          <p:cNvPr id="122" name="Column 2 text"/>
+          <p:cNvSpPr>
+            <a:spLocks noGrp="1"/>
+          </p:cNvSpPr>
+          <p:nvPr>
+            <p:ph type="body" idx="4"/>
+          </p:nvPr>
+        </p:nvSpPr>
+        <p:spPr>
+          <a:xfrm>
+            <a:off x="3543300" y="2590800"/>
+            <a:ext cx="2057400" cy="952500"/>
           </a:xfrm>
           <a:prstGeom prst="rect">
             <a:avLst/>
@@ -1574,13 +1779,13 @@
           <a:lstStyle>
             <a:lvl1pPr marL="0" indent="0" algn="l">
               <a:lnSpc>
-                <a:spcPts val="3100"/>
+                <a:spcPts val="2325"/>
               </a:lnSpc>
               <a:spcBef>
                 <a:spcPts val="0"/>
               </a:spcBef>
               <a:buNone/>
-              <a:defRPr sz="2400" b="0">
+              <a:defRPr sz="1800" b="0">
                 <a:solidFill>
                   <a:srgbClr val="182232"/>
                 </a:solidFill>
@@ -1600,14 +1805,14 @@
       </p:sp>
       <p:sp>
         <p:nvSpPr>
-          <p:cNvPr id="118" name="Card 2"/>
+          <p:cNvPr id="123" name="Card 3"/>
           <p:cNvSpPr/>
           <p:nvPr/>
         </p:nvSpPr>
         <p:spPr>
           <a:xfrm>
-            <a:off x="4419600" y="1651000"/>
-            <a:ext cx="3352800" cy="3302000"/>
+            <a:off x="6057900" y="1238250"/>
+            <a:ext cx="2514600" cy="2476500"/>
           </a:xfrm>
           <a:prstGeom prst="roundRect">
             <a:avLst>
@@ -1629,14 +1834,14 @@
       </p:sp>
       <p:sp>
         <p:nvSpPr>
-          <p:cNvPr id="119" name="Pill 2"/>
+          <p:cNvPr id="124" name="Pill 3"/>
           <p:cNvSpPr/>
           <p:nvPr/>
         </p:nvSpPr>
         <p:spPr>
           <a:xfrm>
-            <a:off x="4724400" y="1955800"/>
-            <a:ext cx="609600" cy="406400"/>
+            <a:off x="6286500" y="1466850"/>
+            <a:ext cx="457200" cy="304800"/>
           </a:xfrm>
           <a:prstGeom prst="roundRect">
             <a:avLst>
@@ -1644,7 +1849,7 @@
             </a:avLst>
           </a:prstGeom>
           <a:solidFill>
-            <a:srgbClr val="FF6E1D"/>
+            <a:srgbClr val="B5DC3A"/>
           </a:solidFill>
           <a:ln>
             <a:noFill/>
@@ -1658,14 +1863,14 @@
       </p:sp>
       <p:sp>
         <p:nvSpPr>
-          <p:cNvPr id="120" name="Pill number 2"/>
+          <p:cNvPr id="125" name="Pill number 3"/>
           <p:cNvSpPr txBox="1"/>
           <p:nvPr/>
         </p:nvSpPr>
         <p:spPr>
           <a:xfrm>
-            <a:off x="4724400" y="2044700"/>
-            <a:ext cx="609600" cy="254000"/>
+            <a:off x="6286500" y="1533525"/>
+            <a:ext cx="457200" cy="190500"/>
           </a:xfrm>
           <a:prstGeom prst="rect">
             <a:avLst/>
@@ -1679,318 +1884,113 @@
           <a:lstStyle>
             <a:lvl1pPr marL="0" indent="0" algn="ctr">
               <a:lnSpc>
-                <a:spcPts val="2350"/>
+                <a:spcPts val="1762"/>
+              </a:lnSpc>
+              <a:spcBef>
+                <a:spcPts val="0"/>
+              </a:spcBef>
+              <a:buNone/>
+              <a:defRPr sz="1350" b="0">
+                <a:solidFill>
+                  <a:srgbClr val="182232"/>
+                </a:solidFill>
+                <a:latin typeface="Space Grotesk"/>
+                <a:ea typeface="Space Grotesk"/>
+                <a:cs typeface="Space Grotesk"/>
+              </a:defRPr>
+            </a:lvl1pPr>
+          </a:lstStyle>
+          <a:p>
+            <a:r>
+              <a:rPr lang="en-US"/>
+              <a:t>03</a:t>
+            </a:r>
+          </a:p>
+        </p:txBody>
+      </p:sp>
+      <p:sp>
+        <p:nvSpPr>
+          <p:cNvPr id="126" name="Column 3 title"/>
+          <p:cNvSpPr>
+            <a:spLocks noGrp="1"/>
+          </p:cNvSpPr>
+          <p:nvPr>
+            <p:ph type="body" idx="5"/>
+          </p:nvPr>
+        </p:nvSpPr>
+        <p:spPr>
+          <a:xfrm>
+            <a:off x="6286500" y="1924050"/>
+            <a:ext cx="2057400" cy="571500"/>
+          </a:xfrm>
+          <a:prstGeom prst="rect">
+            <a:avLst/>
+          </a:prstGeom>
+        </p:spPr>
+        <p:txBody>
+          <a:bodyPr wrap="square" lIns="0" tIns="0" rIns="0" bIns="0" anchor="t">
+            <a:noAutofit/>
+          </a:bodyPr>
+          <a:lstStyle>
+            <a:lvl1pPr marL="0" indent="0" algn="l">
+              <a:lnSpc>
+                <a:spcPts val="2325"/>
+              </a:lnSpc>
+              <a:spcBef>
+                <a:spcPts val="0"/>
+              </a:spcBef>
+              <a:buNone/>
+              <a:defRPr sz="1800" b="1">
+                <a:solidFill>
+                  <a:srgbClr val="182232"/>
+                </a:solidFill>
+                <a:latin typeface="Space Grotesk"/>
+                <a:ea typeface="Space Grotesk"/>
+                <a:cs typeface="Space Grotesk"/>
+              </a:defRPr>
+            </a:lvl1pPr>
+          </a:lstStyle>
+          <a:p>
+            <a:r>
+              <a:rPr lang="en-US"/>
+              <a:t>Column title</a:t>
+            </a:r>
+          </a:p>
+        </p:txBody>
+      </p:sp>
+      <p:sp>
+        <p:nvSpPr>
+          <p:cNvPr id="127" name="Column 3 text"/>
+          <p:cNvSpPr>
+            <a:spLocks noGrp="1"/>
+          </p:cNvSpPr>
+          <p:nvPr>
+            <p:ph type="body" idx="6"/>
+          </p:nvPr>
+        </p:nvSpPr>
+        <p:spPr>
+          <a:xfrm>
+            <a:off x="6286500" y="2590800"/>
+            <a:ext cx="2057400" cy="952500"/>
+          </a:xfrm>
+          <a:prstGeom prst="rect">
+            <a:avLst/>
+          </a:prstGeom>
+        </p:spPr>
+        <p:txBody>
+          <a:bodyPr wrap="square" lIns="0" tIns="0" rIns="0" bIns="0" anchor="t">
+            <a:noAutofit/>
+          </a:bodyPr>
+          <a:lstStyle>
+            <a:lvl1pPr marL="0" indent="0" algn="l">
+              <a:lnSpc>
+                <a:spcPts val="2325"/>
               </a:lnSpc>
               <a:spcBef>
                 <a:spcPts val="0"/>
               </a:spcBef>
               <a:buNone/>
               <a:defRPr sz="1800" b="0">
-                <a:solidFill>
-                  <a:srgbClr val="182232"/>
-                </a:solidFill>
-                <a:latin typeface="Space Grotesk"/>
-                <a:ea typeface="Space Grotesk"/>
-                <a:cs typeface="Space Grotesk"/>
-              </a:defRPr>
-            </a:lvl1pPr>
-          </a:lstStyle>
-          <a:p>
-            <a:r>
-              <a:rPr lang="en-US"/>
-              <a:t>02</a:t>
-            </a:r>
-          </a:p>
-        </p:txBody>
-      </p:sp>
-      <p:sp>
-        <p:nvSpPr>
-          <p:cNvPr id="121" name="Column 2 title"/>
-          <p:cNvSpPr>
-            <a:spLocks noGrp="1"/>
-          </p:cNvSpPr>
-          <p:nvPr>
-            <p:ph type="body" idx="3"/>
-          </p:nvPr>
-        </p:nvSpPr>
-        <p:spPr>
-          <a:xfrm>
-            <a:off x="4724400" y="2565400"/>
-            <a:ext cx="2743200" cy="762000"/>
-          </a:xfrm>
-          <a:prstGeom prst="rect">
-            <a:avLst/>
-          </a:prstGeom>
-        </p:spPr>
-        <p:txBody>
-          <a:bodyPr wrap="square" lIns="0" tIns="0" rIns="0" bIns="0" anchor="t">
-            <a:noAutofit/>
-          </a:bodyPr>
-          <a:lstStyle>
-            <a:lvl1pPr marL="0" indent="0" algn="l">
-              <a:lnSpc>
-                <a:spcPts val="3100"/>
-              </a:lnSpc>
-              <a:spcBef>
-                <a:spcPts val="0"/>
-              </a:spcBef>
-              <a:buNone/>
-              <a:defRPr sz="2400" b="1">
-                <a:solidFill>
-                  <a:srgbClr val="182232"/>
-                </a:solidFill>
-                <a:latin typeface="Space Grotesk"/>
-                <a:ea typeface="Space Grotesk"/>
-                <a:cs typeface="Space Grotesk"/>
-              </a:defRPr>
-            </a:lvl1pPr>
-          </a:lstStyle>
-          <a:p>
-            <a:r>
-              <a:rPr lang="en-US"/>
-              <a:t>Column title</a:t>
-            </a:r>
-          </a:p>
-        </p:txBody>
-      </p:sp>
-      <p:sp>
-        <p:nvSpPr>
-          <p:cNvPr id="122" name="Column 2 text"/>
-          <p:cNvSpPr>
-            <a:spLocks noGrp="1"/>
-          </p:cNvSpPr>
-          <p:nvPr>
-            <p:ph type="body" idx="4"/>
-          </p:nvPr>
-        </p:nvSpPr>
-        <p:spPr>
-          <a:xfrm>
-            <a:off x="4724400" y="3454400"/>
-            <a:ext cx="2743200" cy="1270000"/>
-          </a:xfrm>
-          <a:prstGeom prst="rect">
-            <a:avLst/>
-          </a:prstGeom>
-        </p:spPr>
-        <p:txBody>
-          <a:bodyPr wrap="square" lIns="0" tIns="0" rIns="0" bIns="0" anchor="t">
-            <a:noAutofit/>
-          </a:bodyPr>
-          <a:lstStyle>
-            <a:lvl1pPr marL="0" indent="0" algn="l">
-              <a:lnSpc>
-                <a:spcPts val="3100"/>
-              </a:lnSpc>
-              <a:spcBef>
-                <a:spcPts val="0"/>
-              </a:spcBef>
-              <a:buNone/>
-              <a:defRPr sz="2400" b="0">
-                <a:solidFill>
-                  <a:srgbClr val="182232"/>
-                </a:solidFill>
-                <a:latin typeface="Space Grotesk"/>
-                <a:ea typeface="Space Grotesk"/>
-                <a:cs typeface="Space Grotesk"/>
-              </a:defRPr>
-            </a:lvl1pPr>
-          </a:lstStyle>
-          <a:p>
-            <a:r>
-              <a:rPr lang="en-US"/>
-              <a:t>One or two short lines</a:t>
-            </a:r>
-          </a:p>
-        </p:txBody>
-      </p:sp>
-      <p:sp>
-        <p:nvSpPr>
-          <p:cNvPr id="123" name="Card 3"/>
-          <p:cNvSpPr/>
-          <p:nvPr/>
-        </p:nvSpPr>
-        <p:spPr>
-          <a:xfrm>
-            <a:off x="8077200" y="1651000"/>
-            <a:ext cx="3352800" cy="3302000"/>
-          </a:xfrm>
-          <a:prstGeom prst="roundRect">
-            <a:avLst>
-              <a:gd name="adj" fmla="val 3077"/>
-            </a:avLst>
-          </a:prstGeom>
-          <a:solidFill>
-            <a:srgbClr val="F4F4F4"/>
-          </a:solidFill>
-          <a:ln>
-            <a:noFill/>
-          </a:ln>
-        </p:spPr>
-        <p:txBody>
-          <a:bodyPr/>
-          <a:lstStyle/>
-          <a:p/>
-        </p:txBody>
-      </p:sp>
-      <p:sp>
-        <p:nvSpPr>
-          <p:cNvPr id="124" name="Pill 3"/>
-          <p:cNvSpPr/>
-          <p:nvPr/>
-        </p:nvSpPr>
-        <p:spPr>
-          <a:xfrm>
-            <a:off x="8382000" y="1955800"/>
-            <a:ext cx="609600" cy="406400"/>
-          </a:xfrm>
-          <a:prstGeom prst="roundRect">
-            <a:avLst>
-              <a:gd name="adj" fmla="val 25000"/>
-            </a:avLst>
-          </a:prstGeom>
-          <a:solidFill>
-            <a:srgbClr val="B5DC3A"/>
-          </a:solidFill>
-          <a:ln>
-            <a:noFill/>
-          </a:ln>
-        </p:spPr>
-        <p:txBody>
-          <a:bodyPr/>
-          <a:lstStyle/>
-          <a:p/>
-        </p:txBody>
-      </p:sp>
-      <p:sp>
-        <p:nvSpPr>
-          <p:cNvPr id="125" name="Pill number 3"/>
-          <p:cNvSpPr txBox="1"/>
-          <p:nvPr/>
-        </p:nvSpPr>
-        <p:spPr>
-          <a:xfrm>
-            <a:off x="8382000" y="2044700"/>
-            <a:ext cx="609600" cy="254000"/>
-          </a:xfrm>
-          <a:prstGeom prst="rect">
-            <a:avLst/>
-          </a:prstGeom>
-          <a:noFill/>
-        </p:spPr>
-        <p:txBody>
-          <a:bodyPr wrap="square" lIns="0" tIns="0" rIns="0" bIns="0" anchor="t">
-            <a:noAutofit/>
-          </a:bodyPr>
-          <a:lstStyle>
-            <a:lvl1pPr marL="0" indent="0" algn="ctr">
-              <a:lnSpc>
-                <a:spcPts val="2350"/>
-              </a:lnSpc>
-              <a:spcBef>
-                <a:spcPts val="0"/>
-              </a:spcBef>
-              <a:buNone/>
-              <a:defRPr sz="1800" b="0">
-                <a:solidFill>
-                  <a:srgbClr val="182232"/>
-                </a:solidFill>
-                <a:latin typeface="Space Grotesk"/>
-                <a:ea typeface="Space Grotesk"/>
-                <a:cs typeface="Space Grotesk"/>
-              </a:defRPr>
-            </a:lvl1pPr>
-          </a:lstStyle>
-          <a:p>
-            <a:r>
-              <a:rPr lang="en-US"/>
-              <a:t>03</a:t>
-            </a:r>
-          </a:p>
-        </p:txBody>
-      </p:sp>
-      <p:sp>
-        <p:nvSpPr>
-          <p:cNvPr id="126" name="Column 3 title"/>
-          <p:cNvSpPr>
-            <a:spLocks noGrp="1"/>
-          </p:cNvSpPr>
-          <p:nvPr>
-            <p:ph type="body" idx="5"/>
-          </p:nvPr>
-        </p:nvSpPr>
-        <p:spPr>
-          <a:xfrm>
-            <a:off x="8382000" y="2565400"/>
-            <a:ext cx="2743200" cy="762000"/>
-          </a:xfrm>
-          <a:prstGeom prst="rect">
-            <a:avLst/>
-          </a:prstGeom>
-        </p:spPr>
-        <p:txBody>
-          <a:bodyPr wrap="square" lIns="0" tIns="0" rIns="0" bIns="0" anchor="t">
-            <a:noAutofit/>
-          </a:bodyPr>
-          <a:lstStyle>
-            <a:lvl1pPr marL="0" indent="0" algn="l">
-              <a:lnSpc>
-                <a:spcPts val="3100"/>
-              </a:lnSpc>
-              <a:spcBef>
-                <a:spcPts val="0"/>
-              </a:spcBef>
-              <a:buNone/>
-              <a:defRPr sz="2400" b="1">
-                <a:solidFill>
-                  <a:srgbClr val="182232"/>
-                </a:solidFill>
-                <a:latin typeface="Space Grotesk"/>
-                <a:ea typeface="Space Grotesk"/>
-                <a:cs typeface="Space Grotesk"/>
-              </a:defRPr>
-            </a:lvl1pPr>
-          </a:lstStyle>
-          <a:p>
-            <a:r>
-              <a:rPr lang="en-US"/>
-              <a:t>Column title</a:t>
-            </a:r>
-          </a:p>
-        </p:txBody>
-      </p:sp>
-      <p:sp>
-        <p:nvSpPr>
-          <p:cNvPr id="127" name="Column 3 text"/>
-          <p:cNvSpPr>
-            <a:spLocks noGrp="1"/>
-          </p:cNvSpPr>
-          <p:nvPr>
-            <p:ph type="body" idx="6"/>
-          </p:nvPr>
-        </p:nvSpPr>
-        <p:spPr>
-          <a:xfrm>
-            <a:off x="8382000" y="3454400"/>
-            <a:ext cx="2743200" cy="1270000"/>
-          </a:xfrm>
-          <a:prstGeom prst="rect">
-            <a:avLst/>
-          </a:prstGeom>
-        </p:spPr>
-        <p:txBody>
-          <a:bodyPr wrap="square" lIns="0" tIns="0" rIns="0" bIns="0" anchor="t">
-            <a:noAutofit/>
-          </a:bodyPr>
-          <a:lstStyle>
-            <a:lvl1pPr marL="0" indent="0" algn="l">
-              <a:lnSpc>
-                <a:spcPts val="3100"/>
-              </a:lnSpc>
-              <a:spcBef>
-                <a:spcPts val="0"/>
-              </a:spcBef>
-              <a:buNone/>
-              <a:defRPr sz="2400" b="0">
                 <a:solidFill>
                   <a:srgbClr val="182232"/>
                 </a:solidFill>
@@ -2062,8 +2062,8 @@
         </p:nvSpPr>
         <p:spPr>
           <a:xfrm>
-            <a:off x="762000" y="2489200"/>
-            <a:ext cx="6350000" cy="298450"/>
+            <a:off x="571500" y="1866900"/>
+            <a:ext cx="4762500" cy="223838"/>
           </a:xfrm>
           <a:prstGeom prst="rect">
             <a:avLst/>
@@ -2076,13 +2076,13 @@
           <a:lstStyle>
             <a:lvl1pPr marL="0" indent="0" algn="l">
               <a:lnSpc>
-                <a:spcPts val="2350"/>
+                <a:spcPts val="1762"/>
               </a:lnSpc>
               <a:spcBef>
                 <a:spcPts val="0"/>
               </a:spcBef>
               <a:buNone/>
-              <a:defRPr sz="1800" b="0">
+              <a:defRPr sz="1350" b="0">
                 <a:solidFill>
                   <a:srgbClr val="182232"/>
                 </a:solidFill>
@@ -2112,8 +2112,8 @@
         </p:nvSpPr>
         <p:spPr>
           <a:xfrm>
-            <a:off x="762000" y="2895600"/>
-            <a:ext cx="6350000" cy="2413000"/>
+            <a:off x="571500" y="2171700"/>
+            <a:ext cx="4762500" cy="1809750"/>
           </a:xfrm>
           <a:prstGeom prst="rect">
             <a:avLst/>
@@ -2126,19 +2126,19 @@
           <a:lstStyle>
             <a:lvl1pPr marL="0" indent="0" algn="l">
               <a:lnSpc>
-                <a:spcPts val="6300"/>
+                <a:spcPts val="4725"/>
               </a:lnSpc>
               <a:spcBef>
                 <a:spcPts val="0"/>
               </a:spcBef>
               <a:buNone/>
-              <a:defRPr sz="6000" b="0">
+              <a:defRPr sz="4500" b="1">
                 <a:solidFill>
                   <a:srgbClr val="182232"/>
                 </a:solidFill>
-                <a:latin typeface="PP Neue Machina Inktrap Smbold"/>
-                <a:ea typeface="PP Neue Machina Inktrap Smbold"/>
-                <a:cs typeface="PP Neue Machina Inktrap Smbold"/>
+                <a:latin typeface="Space Grotesk"/>
+                <a:ea typeface="Space Grotesk"/>
+                <a:cs typeface="Space Grotesk"/>
               </a:defRPr>
             </a:lvl1pPr>
           </a:lstStyle>
@@ -2204,8 +2204,8 @@
         </p:nvSpPr>
         <p:spPr>
           <a:xfrm>
-            <a:off x="762000" y="609600"/>
-            <a:ext cx="10668000" cy="609600"/>
+            <a:off x="571500" y="457200"/>
+            <a:ext cx="8001000" cy="457200"/>
           </a:xfrm>
           <a:prstGeom prst="rect">
             <a:avLst/>
@@ -2218,19 +2218,19 @@
           <a:lstStyle>
             <a:lvl1pPr marL="0" indent="0" algn="l">
               <a:lnSpc>
-                <a:spcPts val="4400"/>
+                <a:spcPts val="3300"/>
               </a:lnSpc>
               <a:spcBef>
                 <a:spcPts val="0"/>
               </a:spcBef>
               <a:buNone/>
-              <a:defRPr sz="4000" b="0">
+              <a:defRPr sz="3000" b="1">
                 <a:solidFill>
                   <a:srgbClr val="FFFCFC"/>
                 </a:solidFill>
-                <a:latin typeface="PP Neue Machina Inktrap Smbold"/>
-                <a:ea typeface="PP Neue Machina Inktrap Smbold"/>
-                <a:cs typeface="PP Neue Machina Inktrap Smbold"/>
+                <a:latin typeface="Space Grotesk"/>
+                <a:ea typeface="Space Grotesk"/>
+                <a:cs typeface="Space Grotesk"/>
               </a:defRPr>
             </a:lvl1pPr>
           </a:lstStyle>
@@ -2254,8 +2254,8 @@
         </p:nvSpPr>
         <p:spPr>
           <a:xfrm>
-            <a:off x="762000" y="1625600"/>
-            <a:ext cx="10668000" cy="298450"/>
+            <a:off x="571500" y="1219200"/>
+            <a:ext cx="8001000" cy="223838"/>
           </a:xfrm>
           <a:prstGeom prst="rect">
             <a:avLst/>
@@ -2268,13 +2268,13 @@
           <a:lstStyle>
             <a:lvl1pPr marL="0" indent="0" algn="l">
               <a:lnSpc>
-                <a:spcPts val="2350"/>
+                <a:spcPts val="1762"/>
               </a:lnSpc>
               <a:spcBef>
                 <a:spcPts val="0"/>
               </a:spcBef>
               <a:buNone/>
-              <a:defRPr sz="1800" b="0">
+              <a:defRPr sz="1350" b="0">
                 <a:solidFill>
                   <a:srgbClr val="9FA9FF"/>
                 </a:solidFill>
@@ -2304,8 +2304,8 @@
         </p:nvSpPr>
         <p:spPr>
           <a:xfrm>
-            <a:off x="762000" y="2032000"/>
-            <a:ext cx="10668000" cy="4064000"/>
+            <a:off x="571500" y="1524000"/>
+            <a:ext cx="8001000" cy="3048000"/>
           </a:xfrm>
           <a:prstGeom prst="rect">
             <a:avLst/>
@@ -2318,13 +2318,13 @@
           <a:lstStyle>
             <a:lvl1pPr marL="0" indent="0" algn="l">
               <a:lnSpc>
-                <a:spcPts val="3200"/>
+                <a:spcPts val="2400"/>
               </a:lnSpc>
               <a:spcBef>
                 <a:spcPts val="0"/>
               </a:spcBef>
               <a:buNone/>
-              <a:defRPr sz="2200" b="0">
+              <a:defRPr sz="1650" b="0">
                 <a:solidFill>
                   <a:srgbClr val="FFFCFC"/>
                 </a:solidFill>
@@ -2396,8 +2396,8 @@
         </p:nvSpPr>
         <p:spPr>
           <a:xfrm>
-            <a:off x="762000" y="1524000"/>
-            <a:ext cx="9906000" cy="2095500"/>
+            <a:off x="571500" y="1143000"/>
+            <a:ext cx="7429500" cy="1571625"/>
           </a:xfrm>
           <a:prstGeom prst="rect">
             <a:avLst/>
@@ -2410,19 +2410,19 @@
           <a:lstStyle>
             <a:lvl1pPr marL="0" indent="0" algn="l">
               <a:lnSpc>
-                <a:spcPts val="4600"/>
+                <a:spcPts val="3450"/>
               </a:lnSpc>
               <a:spcBef>
                 <a:spcPts val="0"/>
               </a:spcBef>
               <a:buNone/>
-              <a:defRPr sz="4000" b="0">
+              <a:defRPr sz="3000" b="1">
                 <a:solidFill>
                   <a:srgbClr val="182232"/>
                 </a:solidFill>
-                <a:latin typeface="PP Neue Machina Inktrap Smbold"/>
-                <a:ea typeface="PP Neue Machina Inktrap Smbold"/>
-                <a:cs typeface="PP Neue Machina Inktrap Smbold"/>
+                <a:latin typeface="Space Grotesk"/>
+                <a:ea typeface="Space Grotesk"/>
+                <a:cs typeface="Space Grotesk"/>
               </a:defRPr>
             </a:lvl1pPr>
           </a:lstStyle>
@@ -2442,8 +2442,8 @@
         </p:nvSpPr>
         <p:spPr>
           <a:xfrm>
-            <a:off x="762000" y="3810000"/>
-            <a:ext cx="381000" cy="38100"/>
+            <a:off x="571500" y="2857500"/>
+            <a:ext cx="285750" cy="28575"/>
           </a:xfrm>
           <a:prstGeom prst="rect">
             <a:avLst/>
@@ -2473,8 +2473,8 @@
         </p:nvSpPr>
         <p:spPr>
           <a:xfrm>
-            <a:off x="762000" y="4064000"/>
-            <a:ext cx="7620000" cy="393700"/>
+            <a:off x="571500" y="3048000"/>
+            <a:ext cx="5715000" cy="295275"/>
           </a:xfrm>
           <a:prstGeom prst="rect">
             <a:avLst/>
@@ -2487,13 +2487,13 @@
           <a:lstStyle>
             <a:lvl1pPr marL="0" indent="0" algn="l">
               <a:lnSpc>
-                <a:spcPts val="3100"/>
+                <a:spcPts val="2325"/>
               </a:lnSpc>
               <a:spcBef>
                 <a:spcPts val="0"/>
               </a:spcBef>
               <a:buNone/>
-              <a:defRPr sz="2400" b="1">
+              <a:defRPr sz="1800" b="1">
                 <a:solidFill>
                   <a:srgbClr val="182232"/>
                 </a:solidFill>
@@ -2523,8 +2523,8 @@
         </p:nvSpPr>
         <p:spPr>
           <a:xfrm>
-            <a:off x="762000" y="4470400"/>
-            <a:ext cx="7620000" cy="298450"/>
+            <a:off x="571500" y="3352800"/>
+            <a:ext cx="5715000" cy="223838"/>
           </a:xfrm>
           <a:prstGeom prst="rect">
             <a:avLst/>
@@ -2537,13 +2537,13 @@
           <a:lstStyle>
             <a:lvl1pPr marL="0" indent="0" algn="l">
               <a:lnSpc>
-                <a:spcPts val="2350"/>
+                <a:spcPts val="1762"/>
               </a:lnSpc>
               <a:spcBef>
                 <a:spcPts val="0"/>
               </a:spcBef>
               <a:buNone/>
-              <a:defRPr sz="1800" b="0">
+              <a:defRPr sz="1350" b="0">
                 <a:solidFill>
                   <a:srgbClr val="182232"/>
                 </a:solidFill>
@@ -2615,8 +2615,8 @@
         </p:nvSpPr>
         <p:spPr>
           <a:xfrm>
-            <a:off x="762000" y="609600"/>
-            <a:ext cx="10668000" cy="609600"/>
+            <a:off x="571500" y="457200"/>
+            <a:ext cx="8001000" cy="457200"/>
           </a:xfrm>
           <a:prstGeom prst="rect">
             <a:avLst/>
@@ -2629,19 +2629,19 @@
           <a:lstStyle>
             <a:lvl1pPr marL="0" indent="0" algn="l">
               <a:lnSpc>
-                <a:spcPts val="4400"/>
+                <a:spcPts val="3300"/>
               </a:lnSpc>
               <a:spcBef>
                 <a:spcPts val="0"/>
               </a:spcBef>
               <a:buNone/>
-              <a:defRPr sz="4000" b="0">
+              <a:defRPr sz="3000" b="1">
                 <a:solidFill>
                   <a:srgbClr val="182232"/>
                 </a:solidFill>
-                <a:latin typeface="PP Neue Machina Inktrap Smbold"/>
-                <a:ea typeface="PP Neue Machina Inktrap Smbold"/>
-                <a:cs typeface="PP Neue Machina Inktrap Smbold"/>
+                <a:latin typeface="Space Grotesk"/>
+                <a:ea typeface="Space Grotesk"/>
+                <a:cs typeface="Space Grotesk"/>
               </a:defRPr>
             </a:lvl1pPr>
           </a:lstStyle>
@@ -3278,8 +3278,8 @@
         </p:nvSpPr>
         <p:spPr>
           <a:xfrm>
-            <a:off x="736600" y="3702050"/>
-            <a:ext cx="2260600" cy="400050"/>
+            <a:off x="552450" y="2776538"/>
+            <a:ext cx="1695450" cy="300038"/>
           </a:xfrm>
           <a:prstGeom prst="roundRect">
             <a:avLst>
@@ -3507,12 +3507,12 @@
         </p:nvSpPr>
         <p:spPr>
           <a:xfrm>
-            <a:off x="3117850" y="2724150"/>
-            <a:ext cx="4806950" cy="768350"/>
+            <a:off x="2243138" y="1952625"/>
+            <a:ext cx="3190875" cy="747712"/>
           </a:xfrm>
           <a:prstGeom prst="roundRect">
             <a:avLst>
-              <a:gd name="adj" fmla="val 14049"/>
+              <a:gd name="adj" fmla="val 10828"/>
             </a:avLst>
           </a:prstGeom>
           <a:solidFill>
@@ -3717,8 +3717,8 @@
         </p:blipFill>
         <p:spPr>
           <a:xfrm>
-            <a:off x="2838450" y="1485900"/>
-            <a:ext cx="6515100" cy="4749800"/>
+            <a:off x="2128838" y="1114425"/>
+            <a:ext cx="4886325" cy="3562350"/>
           </a:xfrm>
           <a:prstGeom prst="roundRect">
             <a:avLst>
@@ -4261,8 +4261,8 @@
         </p:nvSpPr>
         <p:spPr>
           <a:xfrm>
-            <a:off x="762000" y="2540000"/>
-            <a:ext cx="3302000" cy="1651000"/>
+            <a:off x="571500" y="1905000"/>
+            <a:ext cx="2476500" cy="1238250"/>
           </a:xfrm>
           <a:prstGeom prst="roundRect">
             <a:avLst>
@@ -4292,16 +4292,16 @@
           </a:fontRef>
         </p:style>
         <p:txBody>
-          <a:bodyPr rtlCol="0" anchor="ctr" lIns="254000" rIns="254000" tIns="254000" bIns="254000" wrap="square"/>
+          <a:bodyPr rtlCol="0" anchor="ctr" lIns="190500" rIns="190500" tIns="190500" bIns="190500" wrap="square"/>
           <a:lstStyle/>
           <a:p>
             <a:pPr algn="l">
               <a:lnSpc>
-                <a:spcPts val="3100"/>
+                <a:spcPts val="2325"/>
               </a:lnSpc>
             </a:pPr>
             <a:r>
-              <a:rPr sz="2400" b="1">
+              <a:rPr sz="1800" b="1">
                 <a:solidFill>
                   <a:srgbClr val="182232"/>
                 </a:solidFill>
@@ -4322,8 +4322,8 @@
         </p:nvSpPr>
         <p:spPr>
           <a:xfrm>
-            <a:off x="762000" y="4394200"/>
-            <a:ext cx="3302000" cy="635000"/>
+            <a:off x="571500" y="3295650"/>
+            <a:ext cx="2476500" cy="476250"/>
           </a:xfrm>
           <a:prstGeom prst="rect">
             <a:avLst/>
@@ -4338,11 +4338,11 @@
           <a:p>
             <a:pPr>
               <a:lnSpc>
-                <a:spcPts val="2350"/>
+                <a:spcPts val="1762"/>
               </a:lnSpc>
             </a:pPr>
             <a:r>
-              <a:rPr sz="1800" b="0">
+              <a:rPr sz="1350" b="0">
                 <a:solidFill>
                   <a:srgbClr val="182232"/>
                 </a:solidFill>
@@ -4363,13 +4363,13 @@
         </p:nvCxnSpPr>
         <p:spPr>
           <a:xfrm>
-            <a:off x="4089400" y="3365500"/>
-            <a:ext cx="317500" cy="0"/>
+            <a:off x="3067050" y="2524125"/>
+            <a:ext cx="238125" cy="0"/>
           </a:xfrm>
           <a:prstGeom prst="line">
             <a:avLst/>
           </a:prstGeom>
-          <a:ln w="25400">
+          <a:ln w="19050">
             <a:solidFill>
               <a:srgbClr val="182232"/>
             </a:solidFill>
@@ -4399,8 +4399,8 @@
         </p:nvSpPr>
         <p:spPr>
           <a:xfrm>
-            <a:off x="4445000" y="2540000"/>
-            <a:ext cx="3302000" cy="1651000"/>
+            <a:off x="3333750" y="1905000"/>
+            <a:ext cx="2476500" cy="1238250"/>
           </a:xfrm>
           <a:prstGeom prst="roundRect">
             <a:avLst>
@@ -4430,16 +4430,16 @@
           </a:fontRef>
         </p:style>
         <p:txBody>
-          <a:bodyPr rtlCol="0" anchor="ctr" lIns="254000" rIns="254000" tIns="254000" bIns="254000" wrap="square"/>
+          <a:bodyPr rtlCol="0" anchor="ctr" lIns="190500" rIns="190500" tIns="190500" bIns="190500" wrap="square"/>
           <a:lstStyle/>
           <a:p>
             <a:pPr algn="l">
               <a:lnSpc>
-                <a:spcPts val="3100"/>
+                <a:spcPts val="2325"/>
               </a:lnSpc>
             </a:pPr>
             <a:r>
-              <a:rPr sz="2400" b="1">
+              <a:rPr sz="1800" b="1">
                 <a:solidFill>
                   <a:srgbClr val="182232"/>
                 </a:solidFill>
@@ -4460,8 +4460,8 @@
         </p:nvSpPr>
         <p:spPr>
           <a:xfrm>
-            <a:off x="4445000" y="4394200"/>
-            <a:ext cx="3302000" cy="635000"/>
+            <a:off x="3333750" y="3295650"/>
+            <a:ext cx="2476500" cy="476250"/>
           </a:xfrm>
           <a:prstGeom prst="rect">
             <a:avLst/>
@@ -4476,11 +4476,11 @@
           <a:p>
             <a:pPr>
               <a:lnSpc>
-                <a:spcPts val="2350"/>
+                <a:spcPts val="1762"/>
               </a:lnSpc>
             </a:pPr>
             <a:r>
-              <a:rPr sz="1800" b="0">
+              <a:rPr sz="1350" b="0">
                 <a:solidFill>
                   <a:srgbClr val="182232"/>
                 </a:solidFill>
@@ -4501,13 +4501,13 @@
         </p:nvCxnSpPr>
         <p:spPr>
           <a:xfrm>
-            <a:off x="7772400" y="3365500"/>
-            <a:ext cx="317500" cy="0"/>
+            <a:off x="5829300" y="2524125"/>
+            <a:ext cx="238125" cy="0"/>
           </a:xfrm>
           <a:prstGeom prst="line">
             <a:avLst/>
           </a:prstGeom>
-          <a:ln w="25400">
+          <a:ln w="19050">
             <a:solidFill>
               <a:srgbClr val="182232"/>
             </a:solidFill>
@@ -4537,8 +4537,8 @@
         </p:nvSpPr>
         <p:spPr>
           <a:xfrm>
-            <a:off x="8128000" y="2540000"/>
-            <a:ext cx="3302000" cy="1651000"/>
+            <a:off x="6096000" y="1905000"/>
+            <a:ext cx="2476500" cy="1238250"/>
           </a:xfrm>
           <a:prstGeom prst="roundRect">
             <a:avLst>
@@ -4568,16 +4568,16 @@
           </a:fontRef>
         </p:style>
         <p:txBody>
-          <a:bodyPr rtlCol="0" anchor="ctr" lIns="254000" rIns="254000" tIns="254000" bIns="254000" wrap="square"/>
+          <a:bodyPr rtlCol="0" anchor="ctr" lIns="190500" rIns="190500" tIns="190500" bIns="190500" wrap="square"/>
           <a:lstStyle/>
           <a:p>
             <a:pPr algn="l">
               <a:lnSpc>
-                <a:spcPts val="3100"/>
+                <a:spcPts val="2325"/>
               </a:lnSpc>
             </a:pPr>
             <a:r>
-              <a:rPr sz="2400" b="1">
+              <a:rPr sz="1800" b="1">
                 <a:solidFill>
                   <a:srgbClr val="182232"/>
                 </a:solidFill>
@@ -4598,8 +4598,8 @@
         </p:nvSpPr>
         <p:spPr>
           <a:xfrm>
-            <a:off x="8128000" y="4394200"/>
-            <a:ext cx="3302000" cy="635000"/>
+            <a:off x="6096000" y="3295650"/>
+            <a:ext cx="2476500" cy="476250"/>
           </a:xfrm>
           <a:prstGeom prst="rect">
             <a:avLst/>
@@ -4614,11 +4614,11 @@
           <a:p>
             <a:pPr>
               <a:lnSpc>
-                <a:spcPts val="2350"/>
+                <a:spcPts val="1762"/>
               </a:lnSpc>
             </a:pPr>
             <a:r>
-              <a:rPr sz="1800" b="0">
+              <a:rPr sz="1350" b="0">
                 <a:solidFill>
                   <a:srgbClr val="182232"/>
                 </a:solidFill>
@@ -4682,7 +4682,7 @@
     </a:clrScheme>
     <a:fontScheme name="Office">
       <a:majorFont>
-        <a:latin typeface="PP Neue Machina Inktrap Smbold"/>
+        <a:latin typeface="Space Grotesk"/>
         <a:ea typeface=""/>
         <a:cs typeface=""/>
         <a:font script="Jpan" typeface="ＭＳ Ｐゴシック"/>

--- a/template/buidlguidl-devcon8.pptx
+++ b/template/buidlguidl-devcon8.pptx
@@ -154,13 +154,163 @@
         </p:nvSpPr>
         <p:spPr>
           <a:xfrm>
-            <a:off x="571500" y="952500"/>
-            <a:ext cx="4762500" cy="223838"/>
+            <a:off x="3429000" y="495300"/>
+            <a:ext cx="5143500" cy="223838"/>
           </a:xfrm>
           <a:prstGeom prst="rect">
             <a:avLst/>
           </a:prstGeom>
           <a:noFill/>
+        </p:spPr>
+        <p:txBody>
+          <a:bodyPr wrap="square" lIns="0" tIns="0" rIns="0" bIns="0" anchor="t">
+            <a:noAutofit/>
+          </a:bodyPr>
+          <a:lstStyle>
+            <a:lvl1pPr marL="0" indent="0" algn="r">
+              <a:lnSpc>
+                <a:spcPts val="1762"/>
+              </a:lnSpc>
+              <a:spcBef>
+                <a:spcPts val="0"/>
+              </a:spcBef>
+              <a:buNone/>
+              <a:defRPr sz="1350" b="0">
+                <a:solidFill>
+                  <a:srgbClr val="182232"/>
+                </a:solidFill>
+                <a:latin typeface="Space Mono"/>
+                <a:ea typeface="Space Mono"/>
+                <a:cs typeface="Space Mono"/>
+              </a:defRPr>
+            </a:lvl1pPr>
+          </a:lstStyle>
+          <a:p>
+            <a:r>
+              <a:rPr lang="en-US"/>
+              <a:t>Devcon 8 · Builder Enablement &amp; BuidlGuidl</a:t>
+            </a:r>
+          </a:p>
+        </p:txBody>
+      </p:sp>
+      <p:sp>
+        <p:nvSpPr>
+          <p:cNvPr id="102" name="Talk title"/>
+          <p:cNvSpPr>
+            <a:spLocks noGrp="1"/>
+          </p:cNvSpPr>
+          <p:nvPr>
+            <p:ph type="title"/>
+          </p:nvPr>
+        </p:nvSpPr>
+        <p:spPr>
+          <a:xfrm>
+            <a:off x="571500" y="895350"/>
+            <a:ext cx="4000500" cy="1924050"/>
+          </a:xfrm>
+          <a:prstGeom prst="rect">
+            <a:avLst/>
+          </a:prstGeom>
+        </p:spPr>
+        <p:txBody>
+          <a:bodyPr wrap="square" lIns="0" tIns="0" rIns="0" bIns="0" anchor="b">
+            <a:noAutofit/>
+          </a:bodyPr>
+          <a:lstStyle>
+            <a:lvl1pPr marL="0" indent="0" algn="l">
+              <a:lnSpc>
+                <a:spcPts val="3788"/>
+              </a:lnSpc>
+              <a:spcBef>
+                <a:spcPts val="0"/>
+              </a:spcBef>
+              <a:buNone/>
+              <a:defRPr sz="3600" b="1">
+                <a:solidFill>
+                  <a:srgbClr val="182232"/>
+                </a:solidFill>
+                <a:latin typeface="Space Grotesk"/>
+                <a:ea typeface="Space Grotesk"/>
+                <a:cs typeface="Space Grotesk"/>
+              </a:defRPr>
+            </a:lvl1pPr>
+          </a:lstStyle>
+          <a:p>
+            <a:r>
+              <a:rPr lang="en-US"/>
+              <a:t>Talk title</a:t>
+            </a:r>
+          </a:p>
+        </p:txBody>
+      </p:sp>
+      <p:sp>
+        <p:nvSpPr>
+          <p:cNvPr id="103" name="Speaker name"/>
+          <p:cNvSpPr>
+            <a:spLocks noGrp="1"/>
+          </p:cNvSpPr>
+          <p:nvPr>
+            <p:ph type="body" idx="1"/>
+          </p:nvPr>
+        </p:nvSpPr>
+        <p:spPr>
+          <a:xfrm>
+            <a:off x="571500" y="3086100"/>
+            <a:ext cx="4000500" cy="295275"/>
+          </a:xfrm>
+          <a:prstGeom prst="rect">
+            <a:avLst/>
+          </a:prstGeom>
+        </p:spPr>
+        <p:txBody>
+          <a:bodyPr wrap="square" lIns="0" tIns="0" rIns="0" bIns="0" anchor="t">
+            <a:noAutofit/>
+          </a:bodyPr>
+          <a:lstStyle>
+            <a:lvl1pPr marL="0" indent="0" algn="l">
+              <a:lnSpc>
+                <a:spcPts val="2325"/>
+              </a:lnSpc>
+              <a:spcBef>
+                <a:spcPts val="0"/>
+              </a:spcBef>
+              <a:buNone/>
+              <a:defRPr sz="1800" b="1">
+                <a:solidFill>
+                  <a:srgbClr val="182232"/>
+                </a:solidFill>
+                <a:latin typeface="Space Grotesk"/>
+                <a:ea typeface="Space Grotesk"/>
+                <a:cs typeface="Space Grotesk"/>
+              </a:defRPr>
+            </a:lvl1pPr>
+          </a:lstStyle>
+          <a:p>
+            <a:r>
+              <a:rPr lang="en-US"/>
+              <a:t>Speaker name</a:t>
+            </a:r>
+          </a:p>
+        </p:txBody>
+      </p:sp>
+      <p:sp>
+        <p:nvSpPr>
+          <p:cNvPr id="104" name="Handle"/>
+          <p:cNvSpPr>
+            <a:spLocks noGrp="1"/>
+          </p:cNvSpPr>
+          <p:nvPr>
+            <p:ph type="body" idx="2"/>
+          </p:nvPr>
+        </p:nvSpPr>
+        <p:spPr>
+          <a:xfrm>
+            <a:off x="571500" y="3390900"/>
+            <a:ext cx="4000500" cy="223838"/>
+          </a:xfrm>
+          <a:prstGeom prst="rect">
+            <a:avLst/>
+          </a:prstGeom>
         </p:spPr>
         <p:txBody>
           <a:bodyPr wrap="square" lIns="0" tIns="0" rIns="0" bIns="0" anchor="t">
@@ -179,166 +329,16 @@
                 <a:solidFill>
                   <a:srgbClr val="182232"/>
                 </a:solidFill>
-                <a:latin typeface="Space Grotesk"/>
-                <a:ea typeface="Space Grotesk"/>
-                <a:cs typeface="Space Grotesk"/>
+                <a:latin typeface="Space Mono"/>
+                <a:ea typeface="Space Mono"/>
+                <a:cs typeface="Space Mono"/>
               </a:defRPr>
             </a:lvl1pPr>
           </a:lstStyle>
           <a:p>
             <a:r>
               <a:rPr lang="en-US"/>
-              <a:t>Devcon 8 · Builder Enablement &amp; BuidlGuidl</a:t>
-            </a:r>
-          </a:p>
-        </p:txBody>
-      </p:sp>
-      <p:sp>
-        <p:nvSpPr>
-          <p:cNvPr id="102" name="Talk title"/>
-          <p:cNvSpPr>
-            <a:spLocks noGrp="1"/>
-          </p:cNvSpPr>
-          <p:nvPr>
-            <p:ph type="title"/>
-          </p:nvPr>
-        </p:nvSpPr>
-        <p:spPr>
-          <a:xfrm>
-            <a:off x="571500" y="1333500"/>
-            <a:ext cx="4000500" cy="1476375"/>
-          </a:xfrm>
-          <a:prstGeom prst="rect">
-            <a:avLst/>
-          </a:prstGeom>
-        </p:spPr>
-        <p:txBody>
-          <a:bodyPr wrap="square" lIns="0" tIns="0" rIns="0" bIns="0" anchor="t">
-            <a:noAutofit/>
-          </a:bodyPr>
-          <a:lstStyle>
-            <a:lvl1pPr marL="0" indent="0" algn="l">
-              <a:lnSpc>
-                <a:spcPts val="3788"/>
-              </a:lnSpc>
-              <a:spcBef>
-                <a:spcPts val="0"/>
-              </a:spcBef>
-              <a:buNone/>
-              <a:defRPr sz="3600" b="1">
-                <a:solidFill>
-                  <a:srgbClr val="182232"/>
-                </a:solidFill>
-                <a:latin typeface="Space Grotesk"/>
-                <a:ea typeface="Space Grotesk"/>
-                <a:cs typeface="Space Grotesk"/>
-              </a:defRPr>
-            </a:lvl1pPr>
-          </a:lstStyle>
-          <a:p>
-            <a:r>
-              <a:rPr lang="en-US"/>
-              <a:t>Talk title</a:t>
-            </a:r>
-          </a:p>
-        </p:txBody>
-      </p:sp>
-      <p:sp>
-        <p:nvSpPr>
-          <p:cNvPr id="103" name="Speaker name"/>
-          <p:cNvSpPr>
-            <a:spLocks noGrp="1"/>
-          </p:cNvSpPr>
-          <p:nvPr>
-            <p:ph type="body" idx="1"/>
-          </p:nvPr>
-        </p:nvSpPr>
-        <p:spPr>
-          <a:xfrm>
-            <a:off x="571500" y="2971800"/>
-            <a:ext cx="4286250" cy="295275"/>
-          </a:xfrm>
-          <a:prstGeom prst="rect">
-            <a:avLst/>
-          </a:prstGeom>
-        </p:spPr>
-        <p:txBody>
-          <a:bodyPr wrap="square" lIns="0" tIns="0" rIns="0" bIns="0" anchor="t">
-            <a:noAutofit/>
-          </a:bodyPr>
-          <a:lstStyle>
-            <a:lvl1pPr marL="0" indent="0" algn="l">
-              <a:lnSpc>
-                <a:spcPts val="2325"/>
-              </a:lnSpc>
-              <a:spcBef>
-                <a:spcPts val="0"/>
-              </a:spcBef>
-              <a:buNone/>
-              <a:defRPr sz="1800" b="1">
-                <a:solidFill>
-                  <a:srgbClr val="182232"/>
-                </a:solidFill>
-                <a:latin typeface="Space Grotesk"/>
-                <a:ea typeface="Space Grotesk"/>
-                <a:cs typeface="Space Grotesk"/>
-              </a:defRPr>
-            </a:lvl1pPr>
-          </a:lstStyle>
-          <a:p>
-            <a:r>
-              <a:rPr lang="en-US"/>
-              <a:t>Speaker name</a:t>
-            </a:r>
-          </a:p>
-        </p:txBody>
-      </p:sp>
-      <p:sp>
-        <p:nvSpPr>
-          <p:cNvPr id="104" name="Role or handle"/>
-          <p:cNvSpPr>
-            <a:spLocks noGrp="1"/>
-          </p:cNvSpPr>
-          <p:nvPr>
-            <p:ph type="body" idx="2"/>
-          </p:nvPr>
-        </p:nvSpPr>
-        <p:spPr>
-          <a:xfrm>
-            <a:off x="571500" y="3276600"/>
-            <a:ext cx="4286250" cy="223838"/>
-          </a:xfrm>
-          <a:prstGeom prst="rect">
-            <a:avLst/>
-          </a:prstGeom>
-        </p:spPr>
-        <p:txBody>
-          <a:bodyPr wrap="square" lIns="0" tIns="0" rIns="0" bIns="0" anchor="t">
-            <a:noAutofit/>
-          </a:bodyPr>
-          <a:lstStyle>
-            <a:lvl1pPr marL="0" indent="0" algn="l">
-              <a:lnSpc>
-                <a:spcPts val="1762"/>
-              </a:lnSpc>
-              <a:spcBef>
-                <a:spcPts val="0"/>
-              </a:spcBef>
-              <a:buNone/>
-              <a:defRPr sz="1350" b="0">
-                <a:solidFill>
-                  <a:srgbClr val="182232"/>
-                </a:solidFill>
-                <a:latin typeface="Space Grotesk"/>
-                <a:ea typeface="Space Grotesk"/>
-                <a:cs typeface="Space Grotesk"/>
-              </a:defRPr>
-            </a:lvl1pPr>
-          </a:lstStyle>
-          <a:p>
-            <a:r>
-              <a:rPr lang="en-US"/>
-              <a:t>Role · @handle</a:t>
+              <a:t>@handle</a:t>
             </a:r>
           </a:p>
         </p:txBody>
@@ -393,13 +393,163 @@
         </p:nvSpPr>
         <p:spPr>
           <a:xfrm>
-            <a:off x="571500" y="952500"/>
-            <a:ext cx="4762500" cy="223838"/>
+            <a:off x="3429000" y="495300"/>
+            <a:ext cx="5143500" cy="223838"/>
           </a:xfrm>
           <a:prstGeom prst="rect">
             <a:avLst/>
           </a:prstGeom>
           <a:noFill/>
+        </p:spPr>
+        <p:txBody>
+          <a:bodyPr wrap="square" lIns="0" tIns="0" rIns="0" bIns="0" anchor="t">
+            <a:noAutofit/>
+          </a:bodyPr>
+          <a:lstStyle>
+            <a:lvl1pPr marL="0" indent="0" algn="r">
+              <a:lnSpc>
+                <a:spcPts val="1762"/>
+              </a:lnSpc>
+              <a:spcBef>
+                <a:spcPts val="0"/>
+              </a:spcBef>
+              <a:buNone/>
+              <a:defRPr sz="1350" b="0">
+                <a:solidFill>
+                  <a:srgbClr val="182232"/>
+                </a:solidFill>
+                <a:latin typeface="Space Mono"/>
+                <a:ea typeface="Space Mono"/>
+                <a:cs typeface="Space Mono"/>
+              </a:defRPr>
+            </a:lvl1pPr>
+          </a:lstStyle>
+          <a:p>
+            <a:r>
+              <a:rPr lang="en-US"/>
+              <a:t>Devcon 8 · Builder Enablement &amp; BuidlGuidl</a:t>
+            </a:r>
+          </a:p>
+        </p:txBody>
+      </p:sp>
+      <p:sp>
+        <p:nvSpPr>
+          <p:cNvPr id="139" name="Thanks"/>
+          <p:cNvSpPr>
+            <a:spLocks noGrp="1"/>
+          </p:cNvSpPr>
+          <p:nvPr>
+            <p:ph type="title"/>
+          </p:nvPr>
+        </p:nvSpPr>
+        <p:spPr>
+          <a:xfrm>
+            <a:off x="571500" y="895350"/>
+            <a:ext cx="4000500" cy="1352550"/>
+          </a:xfrm>
+          <a:prstGeom prst="rect">
+            <a:avLst/>
+          </a:prstGeom>
+        </p:spPr>
+        <p:txBody>
+          <a:bodyPr wrap="square" lIns="0" tIns="0" rIns="0" bIns="0" anchor="b">
+            <a:noAutofit/>
+          </a:bodyPr>
+          <a:lstStyle>
+            <a:lvl1pPr marL="0" indent="0" algn="l">
+              <a:lnSpc>
+                <a:spcPts val="3788"/>
+              </a:lnSpc>
+              <a:spcBef>
+                <a:spcPts val="0"/>
+              </a:spcBef>
+              <a:buNone/>
+              <a:defRPr sz="3600" b="1">
+                <a:solidFill>
+                  <a:srgbClr val="182232"/>
+                </a:solidFill>
+                <a:latin typeface="Space Grotesk"/>
+                <a:ea typeface="Space Grotesk"/>
+                <a:cs typeface="Space Grotesk"/>
+              </a:defRPr>
+            </a:lvl1pPr>
+          </a:lstStyle>
+          <a:p>
+            <a:r>
+              <a:rPr lang="en-US"/>
+              <a:t>Thanks</a:t>
+            </a:r>
+          </a:p>
+        </p:txBody>
+      </p:sp>
+      <p:sp>
+        <p:nvSpPr>
+          <p:cNvPr id="140" name="Speaker name"/>
+          <p:cNvSpPr>
+            <a:spLocks noGrp="1"/>
+          </p:cNvSpPr>
+          <p:nvPr>
+            <p:ph type="body" idx="1"/>
+          </p:nvPr>
+        </p:nvSpPr>
+        <p:spPr>
+          <a:xfrm>
+            <a:off x="571500" y="2514600"/>
+            <a:ext cx="4000500" cy="295275"/>
+          </a:xfrm>
+          <a:prstGeom prst="rect">
+            <a:avLst/>
+          </a:prstGeom>
+        </p:spPr>
+        <p:txBody>
+          <a:bodyPr wrap="square" lIns="0" tIns="0" rIns="0" bIns="0" anchor="t">
+            <a:noAutofit/>
+          </a:bodyPr>
+          <a:lstStyle>
+            <a:lvl1pPr marL="0" indent="0" algn="l">
+              <a:lnSpc>
+                <a:spcPts val="2325"/>
+              </a:lnSpc>
+              <a:spcBef>
+                <a:spcPts val="0"/>
+              </a:spcBef>
+              <a:buNone/>
+              <a:defRPr sz="1800" b="1">
+                <a:solidFill>
+                  <a:srgbClr val="182232"/>
+                </a:solidFill>
+                <a:latin typeface="Space Grotesk"/>
+                <a:ea typeface="Space Grotesk"/>
+                <a:cs typeface="Space Grotesk"/>
+              </a:defRPr>
+            </a:lvl1pPr>
+          </a:lstStyle>
+          <a:p>
+            <a:r>
+              <a:rPr lang="en-US"/>
+              <a:t>Speaker name</a:t>
+            </a:r>
+          </a:p>
+        </p:txBody>
+      </p:sp>
+      <p:sp>
+        <p:nvSpPr>
+          <p:cNvPr id="141" name="Handles"/>
+          <p:cNvSpPr>
+            <a:spLocks noGrp="1"/>
+          </p:cNvSpPr>
+          <p:nvPr>
+            <p:ph type="body" idx="2"/>
+          </p:nvPr>
+        </p:nvSpPr>
+        <p:spPr>
+          <a:xfrm>
+            <a:off x="571500" y="2819400"/>
+            <a:ext cx="4000500" cy="223838"/>
+          </a:xfrm>
+          <a:prstGeom prst="rect">
+            <a:avLst/>
+          </a:prstGeom>
         </p:spPr>
         <p:txBody>
           <a:bodyPr wrap="square" lIns="0" tIns="0" rIns="0" bIns="0" anchor="t">
@@ -418,165 +568,15 @@
                 <a:solidFill>
                   <a:srgbClr val="182232"/>
                 </a:solidFill>
-                <a:latin typeface="Space Grotesk"/>
-                <a:ea typeface="Space Grotesk"/>
-                <a:cs typeface="Space Grotesk"/>
+                <a:latin typeface="Space Mono"/>
+                <a:ea typeface="Space Mono"/>
+                <a:cs typeface="Space Mono"/>
               </a:defRPr>
             </a:lvl1pPr>
           </a:lstStyle>
           <a:p>
             <a:r>
               <a:rPr lang="en-US"/>
-              <a:t>Devcon 8 · Builder Enablement &amp; BuidlGuidl</a:t>
-            </a:r>
-          </a:p>
-        </p:txBody>
-      </p:sp>
-      <p:sp>
-        <p:nvSpPr>
-          <p:cNvPr id="139" name="Thanks"/>
-          <p:cNvSpPr>
-            <a:spLocks noGrp="1"/>
-          </p:cNvSpPr>
-          <p:nvPr>
-            <p:ph type="title"/>
-          </p:nvPr>
-        </p:nvSpPr>
-        <p:spPr>
-          <a:xfrm>
-            <a:off x="571500" y="1333500"/>
-            <a:ext cx="4000500" cy="523875"/>
-          </a:xfrm>
-          <a:prstGeom prst="rect">
-            <a:avLst/>
-          </a:prstGeom>
-        </p:spPr>
-        <p:txBody>
-          <a:bodyPr wrap="square" lIns="0" tIns="0" rIns="0" bIns="0" anchor="t">
-            <a:noAutofit/>
-          </a:bodyPr>
-          <a:lstStyle>
-            <a:lvl1pPr marL="0" indent="0" algn="l">
-              <a:lnSpc>
-                <a:spcPts val="3788"/>
-              </a:lnSpc>
-              <a:spcBef>
-                <a:spcPts val="0"/>
-              </a:spcBef>
-              <a:buNone/>
-              <a:defRPr sz="3600" b="1">
-                <a:solidFill>
-                  <a:srgbClr val="182232"/>
-                </a:solidFill>
-                <a:latin typeface="Space Grotesk"/>
-                <a:ea typeface="Space Grotesk"/>
-                <a:cs typeface="Space Grotesk"/>
-              </a:defRPr>
-            </a:lvl1pPr>
-          </a:lstStyle>
-          <a:p>
-            <a:r>
-              <a:rPr lang="en-US"/>
-              <a:t>Thanks</a:t>
-            </a:r>
-          </a:p>
-        </p:txBody>
-      </p:sp>
-      <p:sp>
-        <p:nvSpPr>
-          <p:cNvPr id="140" name="Speaker name"/>
-          <p:cNvSpPr>
-            <a:spLocks noGrp="1"/>
-          </p:cNvSpPr>
-          <p:nvPr>
-            <p:ph type="body" idx="1"/>
-          </p:nvPr>
-        </p:nvSpPr>
-        <p:spPr>
-          <a:xfrm>
-            <a:off x="571500" y="2095500"/>
-            <a:ext cx="4191000" cy="295275"/>
-          </a:xfrm>
-          <a:prstGeom prst="rect">
-            <a:avLst/>
-          </a:prstGeom>
-        </p:spPr>
-        <p:txBody>
-          <a:bodyPr wrap="square" lIns="0" tIns="0" rIns="0" bIns="0" anchor="t">
-            <a:noAutofit/>
-          </a:bodyPr>
-          <a:lstStyle>
-            <a:lvl1pPr marL="0" indent="0" algn="l">
-              <a:lnSpc>
-                <a:spcPts val="2325"/>
-              </a:lnSpc>
-              <a:spcBef>
-                <a:spcPts val="0"/>
-              </a:spcBef>
-              <a:buNone/>
-              <a:defRPr sz="1800" b="1">
-                <a:solidFill>
-                  <a:srgbClr val="182232"/>
-                </a:solidFill>
-                <a:latin typeface="Space Grotesk"/>
-                <a:ea typeface="Space Grotesk"/>
-                <a:cs typeface="Space Grotesk"/>
-              </a:defRPr>
-            </a:lvl1pPr>
-          </a:lstStyle>
-          <a:p>
-            <a:r>
-              <a:rPr lang="en-US"/>
-              <a:t>Speaker name</a:t>
-            </a:r>
-          </a:p>
-        </p:txBody>
-      </p:sp>
-      <p:sp>
-        <p:nvSpPr>
-          <p:cNvPr id="141" name="Handles"/>
-          <p:cNvSpPr>
-            <a:spLocks noGrp="1"/>
-          </p:cNvSpPr>
-          <p:nvPr>
-            <p:ph type="body" idx="2"/>
-          </p:nvPr>
-        </p:nvSpPr>
-        <p:spPr>
-          <a:xfrm>
-            <a:off x="571500" y="2400300"/>
-            <a:ext cx="4191000" cy="295275"/>
-          </a:xfrm>
-          <a:prstGeom prst="rect">
-            <a:avLst/>
-          </a:prstGeom>
-        </p:spPr>
-        <p:txBody>
-          <a:bodyPr wrap="square" lIns="0" tIns="0" rIns="0" bIns="0" anchor="t">
-            <a:noAutofit/>
-          </a:bodyPr>
-          <a:lstStyle>
-            <a:lvl1pPr marL="0" indent="0" algn="l">
-              <a:lnSpc>
-                <a:spcPts val="2325"/>
-              </a:lnSpc>
-              <a:spcBef>
-                <a:spcPts val="0"/>
-              </a:spcBef>
-              <a:buNone/>
-              <a:defRPr sz="1800" b="0">
-                <a:solidFill>
-                  <a:srgbClr val="182232"/>
-                </a:solidFill>
-                <a:latin typeface="Space Grotesk"/>
-                <a:ea typeface="Space Grotesk"/>
-                <a:cs typeface="Space Grotesk"/>
-              </a:defRPr>
-            </a:lvl1pPr>
-          </a:lstStyle>
-          <a:p>
-            <a:r>
-              <a:rPr lang="en-US"/>
               <a:t>@handle on X and GitHub</a:t>
             </a:r>
           </a:p>
@@ -594,8 +594,8 @@
         </p:nvSpPr>
         <p:spPr>
           <a:xfrm>
-            <a:off x="571500" y="2781300"/>
-            <a:ext cx="4191000" cy="295275"/>
+            <a:off x="571500" y="3276600"/>
+            <a:ext cx="4000500" cy="295275"/>
           </a:xfrm>
           <a:prstGeom prst="rect">
             <a:avLst/>
@@ -682,13 +682,163 @@
         </p:nvSpPr>
         <p:spPr>
           <a:xfrm>
-            <a:off x="571500" y="952500"/>
-            <a:ext cx="4762500" cy="223838"/>
+            <a:off x="3429000" y="495300"/>
+            <a:ext cx="5143500" cy="223838"/>
           </a:xfrm>
           <a:prstGeom prst="rect">
             <a:avLst/>
           </a:prstGeom>
           <a:noFill/>
+        </p:spPr>
+        <p:txBody>
+          <a:bodyPr wrap="square" lIns="0" tIns="0" rIns="0" bIns="0" anchor="t">
+            <a:noAutofit/>
+          </a:bodyPr>
+          <a:lstStyle>
+            <a:lvl1pPr marL="0" indent="0" algn="r">
+              <a:lnSpc>
+                <a:spcPts val="1762"/>
+              </a:lnSpc>
+              <a:spcBef>
+                <a:spcPts val="0"/>
+              </a:spcBef>
+              <a:buNone/>
+              <a:defRPr sz="1350" b="0">
+                <a:solidFill>
+                  <a:srgbClr val="182232"/>
+                </a:solidFill>
+                <a:latin typeface="Space Mono"/>
+                <a:ea typeface="Space Mono"/>
+                <a:cs typeface="Space Mono"/>
+              </a:defRPr>
+            </a:lvl1pPr>
+          </a:lstStyle>
+          <a:p>
+            <a:r>
+              <a:rPr lang="en-US"/>
+              <a:t>Up next</a:t>
+            </a:r>
+          </a:p>
+        </p:txBody>
+      </p:sp>
+      <p:sp>
+        <p:nvSpPr>
+          <p:cNvPr id="144" name="Talk title"/>
+          <p:cNvSpPr>
+            <a:spLocks noGrp="1"/>
+          </p:cNvSpPr>
+          <p:nvPr>
+            <p:ph type="title"/>
+          </p:nvPr>
+        </p:nvSpPr>
+        <p:spPr>
+          <a:xfrm>
+            <a:off x="571500" y="895350"/>
+            <a:ext cx="4000500" cy="1924050"/>
+          </a:xfrm>
+          <a:prstGeom prst="rect">
+            <a:avLst/>
+          </a:prstGeom>
+        </p:spPr>
+        <p:txBody>
+          <a:bodyPr wrap="square" lIns="0" tIns="0" rIns="0" bIns="0" anchor="b">
+            <a:noAutofit/>
+          </a:bodyPr>
+          <a:lstStyle>
+            <a:lvl1pPr marL="0" indent="0" algn="l">
+              <a:lnSpc>
+                <a:spcPts val="3788"/>
+              </a:lnSpc>
+              <a:spcBef>
+                <a:spcPts val="0"/>
+              </a:spcBef>
+              <a:buNone/>
+              <a:defRPr sz="3600" b="1">
+                <a:solidFill>
+                  <a:srgbClr val="182232"/>
+                </a:solidFill>
+                <a:latin typeface="Space Grotesk"/>
+                <a:ea typeface="Space Grotesk"/>
+                <a:cs typeface="Space Grotesk"/>
+              </a:defRPr>
+            </a:lvl1pPr>
+          </a:lstStyle>
+          <a:p>
+            <a:r>
+              <a:rPr lang="en-US"/>
+              <a:t>Talk title</a:t>
+            </a:r>
+          </a:p>
+        </p:txBody>
+      </p:sp>
+      <p:sp>
+        <p:nvSpPr>
+          <p:cNvPr id="145" name="Speaker"/>
+          <p:cNvSpPr>
+            <a:spLocks noGrp="1"/>
+          </p:cNvSpPr>
+          <p:nvPr>
+            <p:ph type="body" idx="1"/>
+          </p:nvPr>
+        </p:nvSpPr>
+        <p:spPr>
+          <a:xfrm>
+            <a:off x="571500" y="3086100"/>
+            <a:ext cx="4000500" cy="295275"/>
+          </a:xfrm>
+          <a:prstGeom prst="rect">
+            <a:avLst/>
+          </a:prstGeom>
+        </p:spPr>
+        <p:txBody>
+          <a:bodyPr wrap="square" lIns="0" tIns="0" rIns="0" bIns="0" anchor="t">
+            <a:noAutofit/>
+          </a:bodyPr>
+          <a:lstStyle>
+            <a:lvl1pPr marL="0" indent="0" algn="l">
+              <a:lnSpc>
+                <a:spcPts val="2325"/>
+              </a:lnSpc>
+              <a:spcBef>
+                <a:spcPts val="0"/>
+              </a:spcBef>
+              <a:buNone/>
+              <a:defRPr sz="1800" b="1">
+                <a:solidFill>
+                  <a:srgbClr val="182232"/>
+                </a:solidFill>
+                <a:latin typeface="Space Grotesk"/>
+                <a:ea typeface="Space Grotesk"/>
+                <a:cs typeface="Space Grotesk"/>
+              </a:defRPr>
+            </a:lvl1pPr>
+          </a:lstStyle>
+          <a:p>
+            <a:r>
+              <a:rPr lang="en-US"/>
+              <a:t>Speaker name</a:t>
+            </a:r>
+          </a:p>
+        </p:txBody>
+      </p:sp>
+      <p:sp>
+        <p:nvSpPr>
+          <p:cNvPr id="146" name="Time and room"/>
+          <p:cNvSpPr>
+            <a:spLocks noGrp="1"/>
+          </p:cNvSpPr>
+          <p:nvPr>
+            <p:ph type="body" idx="2"/>
+          </p:nvPr>
+        </p:nvSpPr>
+        <p:spPr>
+          <a:xfrm>
+            <a:off x="571500" y="3390900"/>
+            <a:ext cx="4000500" cy="223838"/>
+          </a:xfrm>
+          <a:prstGeom prst="rect">
+            <a:avLst/>
+          </a:prstGeom>
         </p:spPr>
         <p:txBody>
           <a:bodyPr wrap="square" lIns="0" tIns="0" rIns="0" bIns="0" anchor="t">
@@ -707,159 +857,9 @@
                 <a:solidFill>
                   <a:srgbClr val="182232"/>
                 </a:solidFill>
-                <a:latin typeface="Space Grotesk"/>
-                <a:ea typeface="Space Grotesk"/>
-                <a:cs typeface="Space Grotesk"/>
-              </a:defRPr>
-            </a:lvl1pPr>
-          </a:lstStyle>
-          <a:p>
-            <a:r>
-              <a:rPr lang="en-US"/>
-              <a:t>Up next</a:t>
-            </a:r>
-          </a:p>
-        </p:txBody>
-      </p:sp>
-      <p:sp>
-        <p:nvSpPr>
-          <p:cNvPr id="144" name="Talk title"/>
-          <p:cNvSpPr>
-            <a:spLocks noGrp="1"/>
-          </p:cNvSpPr>
-          <p:nvPr>
-            <p:ph type="title"/>
-          </p:nvPr>
-        </p:nvSpPr>
-        <p:spPr>
-          <a:xfrm>
-            <a:off x="571500" y="1333500"/>
-            <a:ext cx="4000500" cy="1476375"/>
-          </a:xfrm>
-          <a:prstGeom prst="rect">
-            <a:avLst/>
-          </a:prstGeom>
-        </p:spPr>
-        <p:txBody>
-          <a:bodyPr wrap="square" lIns="0" tIns="0" rIns="0" bIns="0" anchor="t">
-            <a:noAutofit/>
-          </a:bodyPr>
-          <a:lstStyle>
-            <a:lvl1pPr marL="0" indent="0" algn="l">
-              <a:lnSpc>
-                <a:spcPts val="3788"/>
-              </a:lnSpc>
-              <a:spcBef>
-                <a:spcPts val="0"/>
-              </a:spcBef>
-              <a:buNone/>
-              <a:defRPr sz="3600" b="1">
-                <a:solidFill>
-                  <a:srgbClr val="182232"/>
-                </a:solidFill>
-                <a:latin typeface="Space Grotesk"/>
-                <a:ea typeface="Space Grotesk"/>
-                <a:cs typeface="Space Grotesk"/>
-              </a:defRPr>
-            </a:lvl1pPr>
-          </a:lstStyle>
-          <a:p>
-            <a:r>
-              <a:rPr lang="en-US"/>
-              <a:t>Talk title</a:t>
-            </a:r>
-          </a:p>
-        </p:txBody>
-      </p:sp>
-      <p:sp>
-        <p:nvSpPr>
-          <p:cNvPr id="145" name="Speaker"/>
-          <p:cNvSpPr>
-            <a:spLocks noGrp="1"/>
-          </p:cNvSpPr>
-          <p:nvPr>
-            <p:ph type="body" idx="1"/>
-          </p:nvPr>
-        </p:nvSpPr>
-        <p:spPr>
-          <a:xfrm>
-            <a:off x="571500" y="2971800"/>
-            <a:ext cx="4286250" cy="295275"/>
-          </a:xfrm>
-          <a:prstGeom prst="rect">
-            <a:avLst/>
-          </a:prstGeom>
-        </p:spPr>
-        <p:txBody>
-          <a:bodyPr wrap="square" lIns="0" tIns="0" rIns="0" bIns="0" anchor="t">
-            <a:noAutofit/>
-          </a:bodyPr>
-          <a:lstStyle>
-            <a:lvl1pPr marL="0" indent="0" algn="l">
-              <a:lnSpc>
-                <a:spcPts val="2325"/>
-              </a:lnSpc>
-              <a:spcBef>
-                <a:spcPts val="0"/>
-              </a:spcBef>
-              <a:buNone/>
-              <a:defRPr sz="1800" b="1">
-                <a:solidFill>
-                  <a:srgbClr val="182232"/>
-                </a:solidFill>
-                <a:latin typeface="Space Grotesk"/>
-                <a:ea typeface="Space Grotesk"/>
-                <a:cs typeface="Space Grotesk"/>
-              </a:defRPr>
-            </a:lvl1pPr>
-          </a:lstStyle>
-          <a:p>
-            <a:r>
-              <a:rPr lang="en-US"/>
-              <a:t>Speaker, affiliation</a:t>
-            </a:r>
-          </a:p>
-        </p:txBody>
-      </p:sp>
-      <p:sp>
-        <p:nvSpPr>
-          <p:cNvPr id="146" name="Time and room"/>
-          <p:cNvSpPr>
-            <a:spLocks noGrp="1"/>
-          </p:cNvSpPr>
-          <p:nvPr>
-            <p:ph type="body" idx="2"/>
-          </p:nvPr>
-        </p:nvSpPr>
-        <p:spPr>
-          <a:xfrm>
-            <a:off x="571500" y="3276600"/>
-            <a:ext cx="4286250" cy="295275"/>
-          </a:xfrm>
-          <a:prstGeom prst="rect">
-            <a:avLst/>
-          </a:prstGeom>
-        </p:spPr>
-        <p:txBody>
-          <a:bodyPr wrap="square" lIns="0" tIns="0" rIns="0" bIns="0" anchor="t">
-            <a:noAutofit/>
-          </a:bodyPr>
-          <a:lstStyle>
-            <a:lvl1pPr marL="0" indent="0" algn="l">
-              <a:lnSpc>
-                <a:spcPts val="2325"/>
-              </a:lnSpc>
-              <a:spcBef>
-                <a:spcPts val="0"/>
-              </a:spcBef>
-              <a:buNone/>
-              <a:defRPr sz="1800" b="0">
-                <a:solidFill>
-                  <a:srgbClr val="182232"/>
-                </a:solidFill>
-                <a:latin typeface="Space Grotesk"/>
-                <a:ea typeface="Space Grotesk"/>
-                <a:cs typeface="Space Grotesk"/>
+                <a:latin typeface="Space Mono"/>
+                <a:ea typeface="Space Mono"/>
+                <a:cs typeface="Space Mono"/>
               </a:defRPr>
             </a:lvl1pPr>
           </a:lstStyle>
@@ -1067,7 +1067,7 @@
         </p:nvSpPr>
         <p:spPr>
           <a:xfrm>
-            <a:off x="571500" y="457200"/>
+            <a:off x="571500" y="571500"/>
             <a:ext cx="8001000" cy="838200"/>
           </a:xfrm>
           <a:prstGeom prst="rect">
@@ -1214,7 +1214,7 @@
         </p:nvSpPr>
         <p:spPr>
           <a:xfrm>
-            <a:off x="571500" y="457200"/>
+            <a:off x="571500" y="571500"/>
             <a:ext cx="8001000" cy="457200"/>
           </a:xfrm>
           <a:prstGeom prst="rect">
@@ -1260,12 +1260,12 @@
         </p:nvSpPr>
         <p:spPr>
           <a:xfrm>
-            <a:off x="571500" y="1104900"/>
-            <a:ext cx="8001000" cy="3581400"/>
+            <a:off x="571500" y="1219200"/>
+            <a:ext cx="8001000" cy="3467100"/>
           </a:xfrm>
           <a:prstGeom prst="roundRect">
             <a:avLst>
-              <a:gd name="adj" fmla="val 2128"/>
+              <a:gd name="adj" fmla="val 2198"/>
             </a:avLst>
           </a:prstGeom>
           <a:solidFill>
@@ -1293,8 +1293,8 @@
         </p:nvSpPr>
         <p:spPr>
           <a:xfrm>
-            <a:off x="762000" y="1295400"/>
-            <a:ext cx="7620000" cy="3200400"/>
+            <a:off x="762000" y="1409700"/>
+            <a:ext cx="7620000" cy="3086100"/>
           </a:xfrm>
           <a:prstGeom prst="rect">
             <a:avLst/>
@@ -1355,7 +1355,7 @@
         </p:nvSpPr>
         <p:spPr>
           <a:xfrm>
-            <a:off x="571500" y="457200"/>
+            <a:off x="571500" y="571500"/>
             <a:ext cx="8001000" cy="457200"/>
           </a:xfrm>
           <a:prstGeom prst="rect">
@@ -1410,7 +1410,7 @@
             </a:avLst>
           </a:prstGeom>
           <a:solidFill>
-            <a:srgbClr val="F4F4F4"/>
+            <a:srgbClr val="FFFCFC"/>
           </a:solidFill>
           <a:ln>
             <a:noFill/>
@@ -1615,7 +1615,7 @@
             </a:avLst>
           </a:prstGeom>
           <a:solidFill>
-            <a:srgbClr val="F4F4F4"/>
+            <a:srgbClr val="FFFCFC"/>
           </a:solidFill>
           <a:ln>
             <a:noFill/>
@@ -1820,7 +1820,7 @@
             </a:avLst>
           </a:prstGeom>
           <a:solidFill>
-            <a:srgbClr val="F4F4F4"/>
+            <a:srgbClr val="FFFCFC"/>
           </a:solidFill>
           <a:ln>
             <a:noFill/>
@@ -2204,7 +2204,7 @@
         </p:nvSpPr>
         <p:spPr>
           <a:xfrm>
-            <a:off x="571500" y="457200"/>
+            <a:off x="571500" y="571500"/>
             <a:ext cx="8001000" cy="457200"/>
           </a:xfrm>
           <a:prstGeom prst="rect">
@@ -2615,7 +2615,7 @@
         </p:nvSpPr>
         <p:spPr>
           <a:xfrm>
-            <a:off x="571500" y="457200"/>
+            <a:off x="571500" y="571500"/>
             <a:ext cx="8001000" cy="457200"/>
           </a:xfrm>
           <a:prstGeom prst="rect">
@@ -2672,7 +2672,7 @@
     <p:bg>
       <p:bgPr>
         <a:solidFill>
-          <a:srgbClr val="FFFCFC"/>
+          <a:srgbClr val="EBECFE"/>
         </a:solidFill>
         <a:effectLst/>
       </p:bgPr>
@@ -3201,23 +3201,44 @@
         </p:nvSpPr>
         <p:spPr/>
         <p:txBody>
+          <a:bodyPr anchor="b"/>
+          <a:lstStyle/>
+          <a:p>
+            <a:r>
+              <a:t>Building on Ethereum with agents</a:t>
+            </a:r>
+          </a:p>
+        </p:txBody>
+      </p:sp>
+      <p:sp>
+        <p:nvSpPr>
+          <p:cNvPr id="3" name="Text Placeholder 2"/>
+          <p:cNvSpPr>
+            <a:spLocks noGrp="1"/>
+          </p:cNvSpPr>
+          <p:nvPr>
+            <p:ph type="body" idx="1"/>
+          </p:nvPr>
+        </p:nvSpPr>
+        <p:spPr/>
+        <p:txBody>
           <a:bodyPr/>
           <a:lstStyle/>
           <a:p>
             <a:r>
-              <a:t>Building on Ethereum with agents</a:t>
-            </a:r>
-          </a:p>
-        </p:txBody>
-      </p:sp>
-      <p:sp>
-        <p:nvSpPr>
-          <p:cNvPr id="3" name="Text Placeholder 2"/>
-          <p:cNvSpPr>
-            <a:spLocks noGrp="1"/>
-          </p:cNvSpPr>
-          <p:nvPr>
-            <p:ph type="body" idx="1"/>
+              <a:t>Shiv Bhonde</a:t>
+            </a:r>
+          </a:p>
+        </p:txBody>
+      </p:sp>
+      <p:sp>
+        <p:nvSpPr>
+          <p:cNvPr id="4" name="Text Placeholder 3"/>
+          <p:cNvSpPr>
+            <a:spLocks noGrp="1"/>
+          </p:cNvSpPr>
+          <p:nvPr>
+            <p:ph type="body" idx="2"/>
           </p:nvPr>
         </p:nvSpPr>
         <p:spPr/>
@@ -3226,28 +3247,7 @@
           <a:lstStyle/>
           <a:p>
             <a:r>
-              <a:t>Shiv Bhonde</a:t>
-            </a:r>
-          </a:p>
-        </p:txBody>
-      </p:sp>
-      <p:sp>
-        <p:nvSpPr>
-          <p:cNvPr id="4" name="Text Placeholder 3"/>
-          <p:cNvSpPr>
-            <a:spLocks noGrp="1"/>
-          </p:cNvSpPr>
-          <p:nvPr>
-            <p:ph type="body" idx="2"/>
-          </p:nvPr>
-        </p:nvSpPr>
-        <p:spPr/>
-        <p:txBody>
-          <a:bodyPr/>
-          <a:lstStyle/>
-          <a:p>
-            <a:r>
-              <a:t>BuidlGuidl · @shivbhonde</a:t>
+              <a:t>@shivbhonde</a:t>
             </a:r>
           </a:p>
         </p:txBody>
@@ -3278,7 +3278,7 @@
         </p:nvSpPr>
         <p:spPr>
           <a:xfrm>
-            <a:off x="552450" y="2776538"/>
+            <a:off x="552450" y="3271838"/>
             <a:ext cx="1695450" cy="300038"/>
           </a:xfrm>
           <a:prstGeom prst="roundRect">
@@ -3328,7 +3328,7 @@
         </p:nvSpPr>
         <p:spPr/>
         <p:txBody>
-          <a:bodyPr/>
+          <a:bodyPr anchor="b"/>
           <a:lstStyle/>
           <a:p>
             <a:r>
@@ -3430,32 +3430,32 @@
         </p:nvSpPr>
         <p:spPr/>
         <p:txBody>
+          <a:bodyPr anchor="b"/>
+          <a:lstStyle/>
+          <a:p>
+            <a:r>
+              <a:t>Building on Ethereum with agents</a:t>
+            </a:r>
+          </a:p>
+        </p:txBody>
+      </p:sp>
+      <p:sp>
+        <p:nvSpPr>
+          <p:cNvPr id="3" name="Text Placeholder 2"/>
+          <p:cNvSpPr>
+            <a:spLocks noGrp="1"/>
+          </p:cNvSpPr>
+          <p:nvPr>
+            <p:ph type="body" idx="1"/>
+          </p:nvPr>
+        </p:nvSpPr>
+        <p:spPr/>
+        <p:txBody>
           <a:bodyPr/>
           <a:lstStyle/>
           <a:p>
             <a:r>
-              <a:t>Building on Ethereum with agents</a:t>
-            </a:r>
-          </a:p>
-        </p:txBody>
-      </p:sp>
-      <p:sp>
-        <p:nvSpPr>
-          <p:cNvPr id="3" name="Text Placeholder 2"/>
-          <p:cNvSpPr>
-            <a:spLocks noGrp="1"/>
-          </p:cNvSpPr>
-          <p:nvPr>
-            <p:ph type="body" idx="1"/>
-          </p:nvPr>
-        </p:nvSpPr>
-        <p:spPr/>
-        <p:txBody>
-          <a:bodyPr/>
-          <a:lstStyle/>
-          <a:p>
-            <a:r>
-              <a:t>Shiv Bhonde, BuidlGuidl</a:t>
+              <a:t>Shiv Bhonde</a:t>
             </a:r>
           </a:p>
         </p:txBody>
@@ -3717,12 +3717,12 @@
         </p:blipFill>
         <p:spPr>
           <a:xfrm>
-            <a:off x="2128838" y="1114425"/>
-            <a:ext cx="4886325" cy="3562350"/>
+            <a:off x="2457450" y="1409700"/>
+            <a:ext cx="4233862" cy="3086100"/>
           </a:xfrm>
           <a:prstGeom prst="roundRect">
             <a:avLst>
-              <a:gd name="adj" fmla="val 1604"/>
+              <a:gd name="adj" fmla="val 1852"/>
             </a:avLst>
           </a:prstGeom>
         </p:spPr>
@@ -4653,7 +4653,7 @@
         <a:srgbClr val="182232"/>
       </a:dk2>
       <a:lt2>
-        <a:srgbClr val="F4F4F4"/>
+        <a:srgbClr val="EBECFE"/>
       </a:lt2>
       <a:accent1>
         <a:srgbClr val="808CFF"/>

--- a/template/buidlguidl-devcon8.pptx
+++ b/template/buidlguidl-devcon8.pptx
@@ -206,7 +206,7 @@
         <p:spPr>
           <a:xfrm>
             <a:off x="571500" y="895350"/>
-            <a:ext cx="4000500" cy="1924050"/>
+            <a:ext cx="5476875" cy="1200150"/>
           </a:xfrm>
           <a:prstGeom prst="rect">
             <a:avLst/>
@@ -255,7 +255,7 @@
         </p:nvSpPr>
         <p:spPr>
           <a:xfrm>
-            <a:off x="571500" y="3086100"/>
+            <a:off x="571500" y="2362200"/>
             <a:ext cx="4000500" cy="295275"/>
           </a:xfrm>
           <a:prstGeom prst="rect">
@@ -305,7 +305,7 @@
         </p:nvSpPr>
         <p:spPr>
           <a:xfrm>
-            <a:off x="571500" y="3390900"/>
+            <a:off x="571500" y="2667000"/>
             <a:ext cx="4000500" cy="223838"/>
           </a:xfrm>
           <a:prstGeom prst="rect">
@@ -445,7 +445,7 @@
         <p:spPr>
           <a:xfrm>
             <a:off x="571500" y="895350"/>
-            <a:ext cx="4000500" cy="1352550"/>
+            <a:ext cx="5476875" cy="1200150"/>
           </a:xfrm>
           <a:prstGeom prst="rect">
             <a:avLst/>
@@ -494,7 +494,7 @@
         </p:nvSpPr>
         <p:spPr>
           <a:xfrm>
-            <a:off x="571500" y="2514600"/>
+            <a:off x="571500" y="2362200"/>
             <a:ext cx="4000500" cy="295275"/>
           </a:xfrm>
           <a:prstGeom prst="rect">
@@ -544,7 +544,7 @@
         </p:nvSpPr>
         <p:spPr>
           <a:xfrm>
-            <a:off x="571500" y="2819400"/>
+            <a:off x="571500" y="2667000"/>
             <a:ext cx="4000500" cy="223838"/>
           </a:xfrm>
           <a:prstGeom prst="rect">
@@ -594,7 +594,7 @@
         </p:nvSpPr>
         <p:spPr>
           <a:xfrm>
-            <a:off x="571500" y="3276600"/>
+            <a:off x="571500" y="3124200"/>
             <a:ext cx="4000500" cy="295275"/>
           </a:xfrm>
           <a:prstGeom prst="rect">
@@ -734,7 +734,7 @@
         <p:spPr>
           <a:xfrm>
             <a:off x="571500" y="895350"/>
-            <a:ext cx="4000500" cy="1924050"/>
+            <a:ext cx="5476875" cy="1200150"/>
           </a:xfrm>
           <a:prstGeom prst="rect">
             <a:avLst/>
@@ -783,7 +783,7 @@
         </p:nvSpPr>
         <p:spPr>
           <a:xfrm>
-            <a:off x="571500" y="3086100"/>
+            <a:off x="571500" y="2362200"/>
             <a:ext cx="4000500" cy="295275"/>
           </a:xfrm>
           <a:prstGeom prst="rect">
@@ -833,7 +833,7 @@
         </p:nvSpPr>
         <p:spPr>
           <a:xfrm>
-            <a:off x="571500" y="3390900"/>
+            <a:off x="571500" y="2667000"/>
             <a:ext cx="4000500" cy="223838"/>
           </a:xfrm>
           <a:prstGeom prst="rect">
@@ -3278,7 +3278,7 @@
         </p:nvSpPr>
         <p:spPr>
           <a:xfrm>
-            <a:off x="552450" y="3271838"/>
+            <a:off x="552450" y="3119438"/>
             <a:ext cx="1695450" cy="300038"/>
           </a:xfrm>
           <a:prstGeom prst="roundRect">
